--- a/public/lessons/year-6-maths/summer/week-26/find-angles-in-triangles-and-quadrilaterals/teaching-powerpoint-v1.pptx
+++ b/public/lessons/year-6-maths/summer/week-26/find-angles-in-triangles-and-quadrilaterals/teaching-powerpoint-v1.pptx
@@ -2,24 +2,24 @@
 <file path=ppt/presentation.xml><?xml version="1.0" encoding="utf-8"?>
 <p:presentation xmlns:p="http://schemas.openxmlformats.org/presentationml/2006/main">
   <p:sldMasterIdLst>
-    <p:sldMasterId xmlns:r="http://schemas.openxmlformats.org/officeDocument/2006/relationships" id="2147483648" r:id="Rf6c49d4e737d4c0c"/>
+    <p:sldMasterId xmlns:r="http://schemas.openxmlformats.org/officeDocument/2006/relationships" id="2147483648" r:id="R654e679f2cb545be"/>
   </p:sldMasterIdLst>
   <p:notesMasterIdLst>
-    <p:notesMasterId xmlns:r="http://schemas.openxmlformats.org/officeDocument/2006/relationships" r:id="Rad205caa9b254dc7"/>
+    <p:notesMasterId xmlns:r="http://schemas.openxmlformats.org/officeDocument/2006/relationships" r:id="R2b101d44e3a34c58"/>
   </p:notesMasterIdLst>
   <p:sldIdLst>
-    <p:sldId xmlns:r="http://schemas.openxmlformats.org/officeDocument/2006/relationships" id="256" r:id="Rc2d77356e5fe4b9b"/>
-    <p:sldId xmlns:r="http://schemas.openxmlformats.org/officeDocument/2006/relationships" id="257" r:id="R42298a8533b64b03"/>
-    <p:sldId xmlns:r="http://schemas.openxmlformats.org/officeDocument/2006/relationships" id="258" r:id="R4168fbfe4c75458e"/>
-    <p:sldId xmlns:r="http://schemas.openxmlformats.org/officeDocument/2006/relationships" id="259" r:id="R7054c60a1ae04b2f"/>
-    <p:sldId xmlns:r="http://schemas.openxmlformats.org/officeDocument/2006/relationships" id="260" r:id="R56e2c68162f9412c"/>
-    <p:sldId xmlns:r="http://schemas.openxmlformats.org/officeDocument/2006/relationships" id="261" r:id="R304a28bd3ecc4fad"/>
-    <p:sldId xmlns:r="http://schemas.openxmlformats.org/officeDocument/2006/relationships" id="262" r:id="R2a6d47ecaae44f93"/>
-    <p:sldId xmlns:r="http://schemas.openxmlformats.org/officeDocument/2006/relationships" id="263" r:id="R121318da19f34c7e"/>
-    <p:sldId xmlns:r="http://schemas.openxmlformats.org/officeDocument/2006/relationships" id="264" r:id="R0b6b1b2d81354b76"/>
-    <p:sldId xmlns:r="http://schemas.openxmlformats.org/officeDocument/2006/relationships" id="265" r:id="Rfcc82cf93e354671"/>
-    <p:sldId xmlns:r="http://schemas.openxmlformats.org/officeDocument/2006/relationships" id="266" r:id="R4c6520deb7484cbd"/>
-    <p:sldId xmlns:r="http://schemas.openxmlformats.org/officeDocument/2006/relationships" id="267" r:id="R76bb17b7fdf949cf"/>
+    <p:sldId xmlns:r="http://schemas.openxmlformats.org/officeDocument/2006/relationships" id="256" r:id="R7c8fd8e50fc84d63"/>
+    <p:sldId xmlns:r="http://schemas.openxmlformats.org/officeDocument/2006/relationships" id="257" r:id="R1b683f083fe64919"/>
+    <p:sldId xmlns:r="http://schemas.openxmlformats.org/officeDocument/2006/relationships" id="258" r:id="R37e0d5697bbd4b53"/>
+    <p:sldId xmlns:r="http://schemas.openxmlformats.org/officeDocument/2006/relationships" id="259" r:id="R55708168259b4381"/>
+    <p:sldId xmlns:r="http://schemas.openxmlformats.org/officeDocument/2006/relationships" id="260" r:id="R9d3790c0fe1d4a3c"/>
+    <p:sldId xmlns:r="http://schemas.openxmlformats.org/officeDocument/2006/relationships" id="261" r:id="Rea295ed6319d4b03"/>
+    <p:sldId xmlns:r="http://schemas.openxmlformats.org/officeDocument/2006/relationships" id="262" r:id="R1e47fdb8a83c4475"/>
+    <p:sldId xmlns:r="http://schemas.openxmlformats.org/officeDocument/2006/relationships" id="263" r:id="R389ab8ce4d374a19"/>
+    <p:sldId xmlns:r="http://schemas.openxmlformats.org/officeDocument/2006/relationships" id="264" r:id="Rfce23e4a12554813"/>
+    <p:sldId xmlns:r="http://schemas.openxmlformats.org/officeDocument/2006/relationships" id="265" r:id="R9f4781dcba364a76"/>
+    <p:sldId xmlns:r="http://schemas.openxmlformats.org/officeDocument/2006/relationships" id="266" r:id="R1fe0986c513740b5"/>
+    <p:sldId xmlns:r="http://schemas.openxmlformats.org/officeDocument/2006/relationships" id="267" r:id="R39727bc8ff1b4e10"/>
   </p:sldIdLst>
   <p:sldSz cx="12192000" cy="6858000"/>
   <p:notesSz cx="6858000" cy="9144000"/>
@@ -873,7 +873,7 @@
           <a:lstStyle xmlns:a="http://schemas.openxmlformats.org/drawingml/2006/main"/>
           <a:p xmlns:a="http://schemas.openxmlformats.org/drawingml/2006/main">
             <a:r>
-              <a:t>I do. Reveal the question, setup and each calculation stage one click at a time. Pupils watch before copying. Model answer: 65 degrees.</a:t>
+              <a:t>I do. Reveal the question, then reveal each mathematical change one click at a time. Point to the numbers and operation that changed before moving to the next line. Final answer: 65 degrees.</a:t>
             </a:r>
           </a:p>
         </p:txBody>
@@ -1291,7 +1291,7 @@
   </p:cSld>
   <p:clrMap bg1="lt1" tx1="dk1" bg2="lt2" tx2="dk2" accent1="accent1" accent2="accent2" accent3="accent3" accent4="accent4" accent5="accent5" accent6="accent6" hlink="hlink" folHlink="folHlink"/>
   <p:sldLayoutIdLst>
-    <p:sldLayoutId xmlns:r="http://schemas.openxmlformats.org/officeDocument/2006/relationships" id="2147483649" r:id="R5e80a3cdaeda4705"/>
+    <p:sldLayoutId xmlns:r="http://schemas.openxmlformats.org/officeDocument/2006/relationships" id="2147483649" r:id="Rb27bd708ec874e24"/>
   </p:sldLayoutIdLst>
   <p:txStyles>
     <p:titleStyle>
@@ -1842,7 +1842,7 @@
           <p:cNvPr id="12" name="">
             <a:extLst xmlns:a="http://schemas.openxmlformats.org/drawingml/2006/main">
               <a:ext uri="{FF2B5EF4-FFF2-40B4-BE49-F238E27FC236}">
-                <a16:creationId xmlns:a16="http://schemas.microsoft.com/office/drawing/2014/main" id="{74A83240-87B9-4C56-9F50-2C9FD654455E}"/>
+                <a16:creationId xmlns:a16="http://schemas.microsoft.com/office/drawing/2014/main" id="{49CF5FC9-23B9-4687-BFF3-0995C56E6F21}"/>
               </a:ext>
             </a:extLst>
           </p:cNvPr>
@@ -1874,7 +1874,7 @@
           <p:cNvPr id="2" name="">
             <a:extLst xmlns:a="http://schemas.openxmlformats.org/drawingml/2006/main">
               <a:ext uri="{FF2B5EF4-FFF2-40B4-BE49-F238E27FC236}">
-                <a16:creationId xmlns:a16="http://schemas.microsoft.com/office/drawing/2014/main" id="{4128CAD3-1B80-4DC1-9008-5E6F5324ECC6}"/>
+                <a16:creationId xmlns:a16="http://schemas.microsoft.com/office/drawing/2014/main" id="{3A8BD142-9981-4C32-8EA3-AF26A2E9399B}"/>
               </a:ext>
             </a:extLst>
           </p:cNvPr>
@@ -1931,7 +1931,7 @@
           <p:cNvPr id="3" name="">
             <a:extLst xmlns:a="http://schemas.openxmlformats.org/drawingml/2006/main">
               <a:ext uri="{FF2B5EF4-FFF2-40B4-BE49-F238E27FC236}">
-                <a16:creationId xmlns:a16="http://schemas.microsoft.com/office/drawing/2014/main" id="{FCE1919E-FBA6-4E2F-803A-763D909ABEEC}"/>
+                <a16:creationId xmlns:a16="http://schemas.microsoft.com/office/drawing/2014/main" id="{C0255992-0040-4DEE-B254-73127584311D}"/>
               </a:ext>
             </a:extLst>
           </p:cNvPr>
@@ -1965,7 +1965,7 @@
           <p:cNvPr id="4" name="">
             <a:extLst xmlns:a="http://schemas.openxmlformats.org/drawingml/2006/main">
               <a:ext uri="{FF2B5EF4-FFF2-40B4-BE49-F238E27FC236}">
-                <a16:creationId xmlns:a16="http://schemas.microsoft.com/office/drawing/2014/main" id="{8E3BA604-E936-46D7-BBEE-E50E34C089C9}"/>
+                <a16:creationId xmlns:a16="http://schemas.microsoft.com/office/drawing/2014/main" id="{C9E61944-16EE-48D7-A595-2512CA7FBFA9}"/>
               </a:ext>
             </a:extLst>
           </p:cNvPr>
@@ -2022,7 +2022,7 @@
           <p:cNvPr id="5" name="">
             <a:extLst xmlns:a="http://schemas.openxmlformats.org/drawingml/2006/main">
               <a:ext uri="{FF2B5EF4-FFF2-40B4-BE49-F238E27FC236}">
-                <a16:creationId xmlns:a16="http://schemas.microsoft.com/office/drawing/2014/main" id="{E736795E-2205-4845-8E75-9829BB77D92F}"/>
+                <a16:creationId xmlns:a16="http://schemas.microsoft.com/office/drawing/2014/main" id="{15AADC5D-37FD-44EB-B3DF-3282829FC089}"/>
               </a:ext>
             </a:extLst>
           </p:cNvPr>
@@ -2079,7 +2079,7 @@
           <p:cNvPr id="6" name="">
             <a:extLst xmlns:a="http://schemas.openxmlformats.org/drawingml/2006/main">
               <a:ext uri="{FF2B5EF4-FFF2-40B4-BE49-F238E27FC236}">
-                <a16:creationId xmlns:a16="http://schemas.microsoft.com/office/drawing/2014/main" id="{723F03FC-EC6D-4CAB-996A-736589F2CD91}"/>
+                <a16:creationId xmlns:a16="http://schemas.microsoft.com/office/drawing/2014/main" id="{AA163C6B-ECB0-438E-B53E-F5F82795D0BD}"/>
               </a:ext>
             </a:extLst>
           </p:cNvPr>
@@ -2113,7 +2113,7 @@
           <p:cNvPr id="7" name="">
             <a:extLst xmlns:a="http://schemas.openxmlformats.org/drawingml/2006/main">
               <a:ext uri="{FF2B5EF4-FFF2-40B4-BE49-F238E27FC236}">
-                <a16:creationId xmlns:a16="http://schemas.microsoft.com/office/drawing/2014/main" id="{70DE8B09-E638-44C4-B438-2FEB69ADD7DD}"/>
+                <a16:creationId xmlns:a16="http://schemas.microsoft.com/office/drawing/2014/main" id="{97591E5B-2281-4DED-88CB-6B4A0546FA3F}"/>
               </a:ext>
             </a:extLst>
           </p:cNvPr>
@@ -2170,7 +2170,7 @@
           <p:cNvPr id="8" name="">
             <a:extLst xmlns:a="http://schemas.openxmlformats.org/drawingml/2006/main">
               <a:ext uri="{FF2B5EF4-FFF2-40B4-BE49-F238E27FC236}">
-                <a16:creationId xmlns:a16="http://schemas.microsoft.com/office/drawing/2014/main" id="{EA141D0F-3CF8-4210-859A-F1A937E1F118}"/>
+                <a16:creationId xmlns:a16="http://schemas.microsoft.com/office/drawing/2014/main" id="{B62ADBB2-CA60-469B-96A5-1E304ED7DB0E}"/>
               </a:ext>
             </a:extLst>
           </p:cNvPr>
@@ -2227,7 +2227,7 @@
           <p:cNvPr id="9" name="">
             <a:extLst xmlns:a="http://schemas.openxmlformats.org/drawingml/2006/main">
               <a:ext uri="{FF2B5EF4-FFF2-40B4-BE49-F238E27FC236}">
-                <a16:creationId xmlns:a16="http://schemas.microsoft.com/office/drawing/2014/main" id="{6EB5A598-09C8-49B5-85BC-1F8EDD809EFF}"/>
+                <a16:creationId xmlns:a16="http://schemas.microsoft.com/office/drawing/2014/main" id="{6EF992C4-D7F3-4B8C-98AF-1938782AD04B}"/>
               </a:ext>
             </a:extLst>
           </p:cNvPr>
@@ -2284,7 +2284,7 @@
           <p:cNvPr id="10" name="">
             <a:extLst xmlns:a="http://schemas.openxmlformats.org/drawingml/2006/main">
               <a:ext uri="{FF2B5EF4-FFF2-40B4-BE49-F238E27FC236}">
-                <a16:creationId xmlns:a16="http://schemas.microsoft.com/office/drawing/2014/main" id="{BAE5053D-F1F5-4C3D-8D42-2958FF556557}"/>
+                <a16:creationId xmlns:a16="http://schemas.microsoft.com/office/drawing/2014/main" id="{6D206454-EEAB-445D-A31A-C35272AE6BDD}"/>
               </a:ext>
             </a:extLst>
           </p:cNvPr>
@@ -2341,7 +2341,7 @@
           <p:cNvPr id="11" name="">
             <a:extLst xmlns:a="http://schemas.openxmlformats.org/drawingml/2006/main">
               <a:ext uri="{FF2B5EF4-FFF2-40B4-BE49-F238E27FC236}">
-                <a16:creationId xmlns:a16="http://schemas.microsoft.com/office/drawing/2014/main" id="{A19B7D79-99F0-4C2E-83AC-540389CF8C6F}"/>
+                <a16:creationId xmlns:a16="http://schemas.microsoft.com/office/drawing/2014/main" id="{B8DA1603-5B3E-4126-8CDC-8F8947B34C1E}"/>
               </a:ext>
             </a:extLst>
           </p:cNvPr>
@@ -2396,7 +2396,7 @@
     </p:spTree>
     <p:extLst>
       <p:ext uri="{BB962C8B-B14F-4D97-AF65-F5344CB8AC3E}">
-        <p14:creationId xmlns:p14="http://schemas.microsoft.com/office/powerpoint/2010/main" val="1474636963"/>
+        <p14:creationId xmlns:p14="http://schemas.microsoft.com/office/powerpoint/2010/main" val="1400105135"/>
       </p:ext>
     </p:extLst>
   </p:cSld>
@@ -2427,7 +2427,7 @@
           <p:cNvPr id="14" name="">
             <a:extLst xmlns:a="http://schemas.openxmlformats.org/drawingml/2006/main">
               <a:ext uri="{FF2B5EF4-FFF2-40B4-BE49-F238E27FC236}">
-                <a16:creationId xmlns:a16="http://schemas.microsoft.com/office/drawing/2014/main" id="{CD5DE2BC-EE57-4F26-8B6C-C2293252D189}"/>
+                <a16:creationId xmlns:a16="http://schemas.microsoft.com/office/drawing/2014/main" id="{C639C4F6-7C57-4858-B117-D17E2E54193D}"/>
               </a:ext>
             </a:extLst>
           </p:cNvPr>
@@ -2459,7 +2459,7 @@
           <p:cNvPr id="2" name="">
             <a:extLst xmlns:a="http://schemas.openxmlformats.org/drawingml/2006/main">
               <a:ext uri="{FF2B5EF4-FFF2-40B4-BE49-F238E27FC236}">
-                <a16:creationId xmlns:a16="http://schemas.microsoft.com/office/drawing/2014/main" id="{05ED332B-E841-4110-B590-2E3435C998A2}"/>
+                <a16:creationId xmlns:a16="http://schemas.microsoft.com/office/drawing/2014/main" id="{28E14EB1-539E-4E70-9097-1875FCBDB3F7}"/>
               </a:ext>
             </a:extLst>
           </p:cNvPr>
@@ -2516,7 +2516,7 @@
           <p:cNvPr id="3" name="">
             <a:extLst xmlns:a="http://schemas.openxmlformats.org/drawingml/2006/main">
               <a:ext uri="{FF2B5EF4-FFF2-40B4-BE49-F238E27FC236}">
-                <a16:creationId xmlns:a16="http://schemas.microsoft.com/office/drawing/2014/main" id="{76D2D5E7-05F0-4416-8FF2-75BDF1A98A0C}"/>
+                <a16:creationId xmlns:a16="http://schemas.microsoft.com/office/drawing/2014/main" id="{C76D165B-FE8B-43C3-95BD-1D995638FDCB}"/>
               </a:ext>
             </a:extLst>
           </p:cNvPr>
@@ -2548,7 +2548,7 @@
           <p:cNvPr id="4" name="">
             <a:extLst xmlns:a="http://schemas.openxmlformats.org/drawingml/2006/main">
               <a:ext uri="{FF2B5EF4-FFF2-40B4-BE49-F238E27FC236}">
-                <a16:creationId xmlns:a16="http://schemas.microsoft.com/office/drawing/2014/main" id="{60596614-7187-4AF8-9434-75C05CD0BAAE}"/>
+                <a16:creationId xmlns:a16="http://schemas.microsoft.com/office/drawing/2014/main" id="{BCA8426B-6AAA-4EFA-A4F7-8142A56C72CB}"/>
               </a:ext>
             </a:extLst>
           </p:cNvPr>
@@ -2605,7 +2605,7 @@
           <p:cNvPr id="5" name="">
             <a:extLst xmlns:a="http://schemas.openxmlformats.org/drawingml/2006/main">
               <a:ext uri="{FF2B5EF4-FFF2-40B4-BE49-F238E27FC236}">
-                <a16:creationId xmlns:a16="http://schemas.microsoft.com/office/drawing/2014/main" id="{B9BA0A9A-75F3-4ED8-8623-B1942331193D}"/>
+                <a16:creationId xmlns:a16="http://schemas.microsoft.com/office/drawing/2014/main" id="{58B28194-2F7F-4E6D-BC68-266A9C520611}"/>
               </a:ext>
             </a:extLst>
           </p:cNvPr>
@@ -2662,7 +2662,7 @@
           <p:cNvPr id="6" name="">
             <a:extLst xmlns:a="http://schemas.openxmlformats.org/drawingml/2006/main">
               <a:ext uri="{FF2B5EF4-FFF2-40B4-BE49-F238E27FC236}">
-                <a16:creationId xmlns:a16="http://schemas.microsoft.com/office/drawing/2014/main" id="{B6FA9C07-7A17-4720-8514-9D5B6DDE5F95}"/>
+                <a16:creationId xmlns:a16="http://schemas.microsoft.com/office/drawing/2014/main" id="{5DF5FDB5-35EC-48C7-B3DE-CB9C8E42ABA3}"/>
               </a:ext>
             </a:extLst>
           </p:cNvPr>
@@ -2719,7 +2719,7 @@
           <p:cNvPr id="7" name="">
             <a:extLst xmlns:a="http://schemas.openxmlformats.org/drawingml/2006/main">
               <a:ext uri="{FF2B5EF4-FFF2-40B4-BE49-F238E27FC236}">
-                <a16:creationId xmlns:a16="http://schemas.microsoft.com/office/drawing/2014/main" id="{AF645193-EE25-4F15-9780-B777FDB64751}"/>
+                <a16:creationId xmlns:a16="http://schemas.microsoft.com/office/drawing/2014/main" id="{491F93D5-3C6B-46A5-B13C-D051E5AD7455}"/>
               </a:ext>
             </a:extLst>
           </p:cNvPr>
@@ -2751,7 +2751,7 @@
           <p:cNvPr id="8" name="">
             <a:extLst xmlns:a="http://schemas.openxmlformats.org/drawingml/2006/main">
               <a:ext uri="{FF2B5EF4-FFF2-40B4-BE49-F238E27FC236}">
-                <a16:creationId xmlns:a16="http://schemas.microsoft.com/office/drawing/2014/main" id="{035F0C4D-97C9-484A-84C1-AB82EAD3E0ED}"/>
+                <a16:creationId xmlns:a16="http://schemas.microsoft.com/office/drawing/2014/main" id="{B67534CB-20B1-403D-968F-092B0DEF6897}"/>
               </a:ext>
             </a:extLst>
           </p:cNvPr>
@@ -2808,7 +2808,7 @@
           <p:cNvPr id="9" name="">
             <a:extLst xmlns:a="http://schemas.openxmlformats.org/drawingml/2006/main">
               <a:ext uri="{FF2B5EF4-FFF2-40B4-BE49-F238E27FC236}">
-                <a16:creationId xmlns:a16="http://schemas.microsoft.com/office/drawing/2014/main" id="{9FC07CF4-1339-47C9-BB14-0439C8AF8BB5}"/>
+                <a16:creationId xmlns:a16="http://schemas.microsoft.com/office/drawing/2014/main" id="{37757ABD-EC31-4C75-A497-E39CA9CB71E6}"/>
               </a:ext>
             </a:extLst>
           </p:cNvPr>
@@ -2865,7 +2865,7 @@
           <p:cNvPr id="10" name="">
             <a:extLst xmlns:a="http://schemas.openxmlformats.org/drawingml/2006/main">
               <a:ext uri="{FF2B5EF4-FFF2-40B4-BE49-F238E27FC236}">
-                <a16:creationId xmlns:a16="http://schemas.microsoft.com/office/drawing/2014/main" id="{16B626D1-43DB-4A68-8EC1-D47C5CB39EEB}"/>
+                <a16:creationId xmlns:a16="http://schemas.microsoft.com/office/drawing/2014/main" id="{3762F38A-8701-427F-B64A-CE30F0FD3E79}"/>
               </a:ext>
             </a:extLst>
           </p:cNvPr>
@@ -2922,7 +2922,7 @@
           <p:cNvPr id="11" name="">
             <a:extLst xmlns:a="http://schemas.openxmlformats.org/drawingml/2006/main">
               <a:ext uri="{FF2B5EF4-FFF2-40B4-BE49-F238E27FC236}">
-                <a16:creationId xmlns:a16="http://schemas.microsoft.com/office/drawing/2014/main" id="{BDF9D79A-0CC0-4891-B811-BD941E0FDC90}"/>
+                <a16:creationId xmlns:a16="http://schemas.microsoft.com/office/drawing/2014/main" id="{A1C3F969-3920-421C-908A-4B5C4A0BD21D}"/>
               </a:ext>
             </a:extLst>
           </p:cNvPr>
@@ -2979,7 +2979,7 @@
           <p:cNvPr id="12" name="">
             <a:extLst xmlns:a="http://schemas.openxmlformats.org/drawingml/2006/main">
               <a:ext uri="{FF2B5EF4-FFF2-40B4-BE49-F238E27FC236}">
-                <a16:creationId xmlns:a16="http://schemas.microsoft.com/office/drawing/2014/main" id="{8694CEBA-550D-44AD-ACFF-1CA2784E60EF}"/>
+                <a16:creationId xmlns:a16="http://schemas.microsoft.com/office/drawing/2014/main" id="{7C8AB2CF-BA6C-458D-8FED-5046315F4163}"/>
               </a:ext>
             </a:extLst>
           </p:cNvPr>
@@ -3036,7 +3036,7 @@
           <p:cNvPr id="13" name="">
             <a:extLst xmlns:a="http://schemas.openxmlformats.org/drawingml/2006/main">
               <a:ext uri="{FF2B5EF4-FFF2-40B4-BE49-F238E27FC236}">
-                <a16:creationId xmlns:a16="http://schemas.microsoft.com/office/drawing/2014/main" id="{EF37D30A-DE66-42B7-9122-254FC2DE6032}"/>
+                <a16:creationId xmlns:a16="http://schemas.microsoft.com/office/drawing/2014/main" id="{8326EA25-657D-4B40-9630-E3B2661BF2FE}"/>
               </a:ext>
             </a:extLst>
           </p:cNvPr>
@@ -3091,7 +3091,7 @@
     </p:spTree>
     <p:extLst>
       <p:ext uri="{BB962C8B-B14F-4D97-AF65-F5344CB8AC3E}">
-        <p14:creationId xmlns:p14="http://schemas.microsoft.com/office/powerpoint/2010/main" val="1388555440"/>
+        <p14:creationId xmlns:p14="http://schemas.microsoft.com/office/powerpoint/2010/main" val="805407406"/>
       </p:ext>
     </p:extLst>
   </p:cSld>
@@ -3292,7 +3292,7 @@
           <p:cNvPr id="19" name="">
             <a:extLst xmlns:a="http://schemas.openxmlformats.org/drawingml/2006/main">
               <a:ext uri="{FF2B5EF4-FFF2-40B4-BE49-F238E27FC236}">
-                <a16:creationId xmlns:a16="http://schemas.microsoft.com/office/drawing/2014/main" id="{71FF6EE1-7865-4753-998E-EB3A549E53A8}"/>
+                <a16:creationId xmlns:a16="http://schemas.microsoft.com/office/drawing/2014/main" id="{1C29D881-9B00-4E69-AFB1-C670EB25C60E}"/>
               </a:ext>
             </a:extLst>
           </p:cNvPr>
@@ -3324,7 +3324,7 @@
           <p:cNvPr id="2" name="">
             <a:extLst xmlns:a="http://schemas.openxmlformats.org/drawingml/2006/main">
               <a:ext uri="{FF2B5EF4-FFF2-40B4-BE49-F238E27FC236}">
-                <a16:creationId xmlns:a16="http://schemas.microsoft.com/office/drawing/2014/main" id="{F3515DED-CDCE-48E6-8C85-E94056CC5006}"/>
+                <a16:creationId xmlns:a16="http://schemas.microsoft.com/office/drawing/2014/main" id="{E9B4E76D-B773-4F5A-962D-404E43230C92}"/>
               </a:ext>
             </a:extLst>
           </p:cNvPr>
@@ -3381,7 +3381,7 @@
           <p:cNvPr id="3" name="">
             <a:extLst xmlns:a="http://schemas.openxmlformats.org/drawingml/2006/main">
               <a:ext uri="{FF2B5EF4-FFF2-40B4-BE49-F238E27FC236}">
-                <a16:creationId xmlns:a16="http://schemas.microsoft.com/office/drawing/2014/main" id="{5D10E93E-3110-4186-9399-E954E0E8D1C1}"/>
+                <a16:creationId xmlns:a16="http://schemas.microsoft.com/office/drawing/2014/main" id="{ACDE25B8-C49B-4F96-8C41-4374DF822DF9}"/>
               </a:ext>
             </a:extLst>
           </p:cNvPr>
@@ -3413,7 +3413,7 @@
           <p:cNvPr id="4" name="">
             <a:extLst xmlns:a="http://schemas.openxmlformats.org/drawingml/2006/main">
               <a:ext uri="{FF2B5EF4-FFF2-40B4-BE49-F238E27FC236}">
-                <a16:creationId xmlns:a16="http://schemas.microsoft.com/office/drawing/2014/main" id="{EF6DA6B9-6947-40D4-AA59-F6C0808E175A}"/>
+                <a16:creationId xmlns:a16="http://schemas.microsoft.com/office/drawing/2014/main" id="{CEB823E1-EE1A-4B70-ACCB-F925DB427540}"/>
               </a:ext>
             </a:extLst>
           </p:cNvPr>
@@ -3470,7 +3470,7 @@
           <p:cNvPr id="5" name="">
             <a:extLst xmlns:a="http://schemas.openxmlformats.org/drawingml/2006/main">
               <a:ext uri="{FF2B5EF4-FFF2-40B4-BE49-F238E27FC236}">
-                <a16:creationId xmlns:a16="http://schemas.microsoft.com/office/drawing/2014/main" id="{9F431ECF-5B22-440C-90ED-655FBFBEB5FC}"/>
+                <a16:creationId xmlns:a16="http://schemas.microsoft.com/office/drawing/2014/main" id="{F16485DA-D570-4C65-A3C1-0E7E4940A5AD}"/>
               </a:ext>
             </a:extLst>
           </p:cNvPr>
@@ -3527,7 +3527,7 @@
           <p:cNvPr id="6" name="">
             <a:extLst xmlns:a="http://schemas.openxmlformats.org/drawingml/2006/main">
               <a:ext uri="{FF2B5EF4-FFF2-40B4-BE49-F238E27FC236}">
-                <a16:creationId xmlns:a16="http://schemas.microsoft.com/office/drawing/2014/main" id="{9ABF156C-E509-4244-81C1-8C81C1516404}"/>
+                <a16:creationId xmlns:a16="http://schemas.microsoft.com/office/drawing/2014/main" id="{3F2BFBE7-192E-4E98-BBA6-5FCEA182E0C2}"/>
               </a:ext>
             </a:extLst>
           </p:cNvPr>
@@ -3584,7 +3584,7 @@
           <p:cNvPr id="7" name="">
             <a:extLst xmlns:a="http://schemas.openxmlformats.org/drawingml/2006/main">
               <a:ext uri="{FF2B5EF4-FFF2-40B4-BE49-F238E27FC236}">
-                <a16:creationId xmlns:a16="http://schemas.microsoft.com/office/drawing/2014/main" id="{82809FF2-F137-4E38-93E8-09A526743842}"/>
+                <a16:creationId xmlns:a16="http://schemas.microsoft.com/office/drawing/2014/main" id="{BF29841F-5977-4990-BA08-2532735F8FA4}"/>
               </a:ext>
             </a:extLst>
           </p:cNvPr>
@@ -3616,7 +3616,7 @@
           <p:cNvPr id="8" name="">
             <a:extLst xmlns:a="http://schemas.openxmlformats.org/drawingml/2006/main">
               <a:ext uri="{FF2B5EF4-FFF2-40B4-BE49-F238E27FC236}">
-                <a16:creationId xmlns:a16="http://schemas.microsoft.com/office/drawing/2014/main" id="{E2A6DCE3-8F60-4961-AD8E-89FF8F6F9C22}"/>
+                <a16:creationId xmlns:a16="http://schemas.microsoft.com/office/drawing/2014/main" id="{8E67D24C-9130-4204-979C-F18F0B4F73DC}"/>
               </a:ext>
             </a:extLst>
           </p:cNvPr>
@@ -3673,7 +3673,7 @@
           <p:cNvPr id="9" name="">
             <a:extLst xmlns:a="http://schemas.openxmlformats.org/drawingml/2006/main">
               <a:ext uri="{FF2B5EF4-FFF2-40B4-BE49-F238E27FC236}">
-                <a16:creationId xmlns:a16="http://schemas.microsoft.com/office/drawing/2014/main" id="{C6F15FEE-BDA7-46A5-A4E0-65182CAE0D40}"/>
+                <a16:creationId xmlns:a16="http://schemas.microsoft.com/office/drawing/2014/main" id="{EC670ADC-6AB1-41C5-A932-9070207D23E2}"/>
               </a:ext>
             </a:extLst>
           </p:cNvPr>
@@ -3730,7 +3730,7 @@
           <p:cNvPr id="10" name="">
             <a:extLst xmlns:a="http://schemas.openxmlformats.org/drawingml/2006/main">
               <a:ext uri="{FF2B5EF4-FFF2-40B4-BE49-F238E27FC236}">
-                <a16:creationId xmlns:a16="http://schemas.microsoft.com/office/drawing/2014/main" id="{43681D37-D1F3-41BE-BF84-97788B85F682}"/>
+                <a16:creationId xmlns:a16="http://schemas.microsoft.com/office/drawing/2014/main" id="{77DB8AA4-71A4-433C-B8D0-DBBC87622B8A}"/>
               </a:ext>
             </a:extLst>
           </p:cNvPr>
@@ -3787,7 +3787,7 @@
           <p:cNvPr id="11" name="">
             <a:extLst xmlns:a="http://schemas.openxmlformats.org/drawingml/2006/main">
               <a:ext uri="{FF2B5EF4-FFF2-40B4-BE49-F238E27FC236}">
-                <a16:creationId xmlns:a16="http://schemas.microsoft.com/office/drawing/2014/main" id="{5C66A52C-93D6-4D68-BCA5-13B346D1F3D2}"/>
+                <a16:creationId xmlns:a16="http://schemas.microsoft.com/office/drawing/2014/main" id="{054ED276-1E35-412F-A99B-3D7CCE2639D8}"/>
               </a:ext>
             </a:extLst>
           </p:cNvPr>
@@ -3821,7 +3821,7 @@
           <p:cNvPr id="12" name="">
             <a:extLst xmlns:a="http://schemas.openxmlformats.org/drawingml/2006/main">
               <a:ext uri="{FF2B5EF4-FFF2-40B4-BE49-F238E27FC236}">
-                <a16:creationId xmlns:a16="http://schemas.microsoft.com/office/drawing/2014/main" id="{B743935E-A635-4A35-9236-827D57B9F4B6}"/>
+                <a16:creationId xmlns:a16="http://schemas.microsoft.com/office/drawing/2014/main" id="{D8CD03B5-1BAE-4BF0-949D-5567B24AB114}"/>
               </a:ext>
             </a:extLst>
           </p:cNvPr>
@@ -3878,7 +3878,7 @@
           <p:cNvPr id="13" name="">
             <a:extLst xmlns:a="http://schemas.openxmlformats.org/drawingml/2006/main">
               <a:ext uri="{FF2B5EF4-FFF2-40B4-BE49-F238E27FC236}">
-                <a16:creationId xmlns:a16="http://schemas.microsoft.com/office/drawing/2014/main" id="{1DEEFAAA-2642-405F-98B3-778808CA37BE}"/>
+                <a16:creationId xmlns:a16="http://schemas.microsoft.com/office/drawing/2014/main" id="{5B829A3E-432A-4B3B-9741-808F12060A7A}"/>
               </a:ext>
             </a:extLst>
           </p:cNvPr>
@@ -3935,7 +3935,7 @@
           <p:cNvPr id="14" name="">
             <a:extLst xmlns:a="http://schemas.openxmlformats.org/drawingml/2006/main">
               <a:ext uri="{FF2B5EF4-FFF2-40B4-BE49-F238E27FC236}">
-                <a16:creationId xmlns:a16="http://schemas.microsoft.com/office/drawing/2014/main" id="{F20988BF-D281-409E-92F1-5F76D196575F}"/>
+                <a16:creationId xmlns:a16="http://schemas.microsoft.com/office/drawing/2014/main" id="{0176C3E3-3B83-4941-A4AE-E03DBBE03731}"/>
               </a:ext>
             </a:extLst>
           </p:cNvPr>
@@ -3992,7 +3992,7 @@
           <p:cNvPr id="15" name="">
             <a:extLst xmlns:a="http://schemas.openxmlformats.org/drawingml/2006/main">
               <a:ext uri="{FF2B5EF4-FFF2-40B4-BE49-F238E27FC236}">
-                <a16:creationId xmlns:a16="http://schemas.microsoft.com/office/drawing/2014/main" id="{6BE50E17-99EA-4FDB-B031-F971435F8155}"/>
+                <a16:creationId xmlns:a16="http://schemas.microsoft.com/office/drawing/2014/main" id="{E5BCAD4F-2234-4945-8B27-03462BBAE76C}"/>
               </a:ext>
             </a:extLst>
           </p:cNvPr>
@@ -4026,7 +4026,7 @@
           <p:cNvPr id="16" name="">
             <a:extLst xmlns:a="http://schemas.openxmlformats.org/drawingml/2006/main">
               <a:ext uri="{FF2B5EF4-FFF2-40B4-BE49-F238E27FC236}">
-                <a16:creationId xmlns:a16="http://schemas.microsoft.com/office/drawing/2014/main" id="{C2937214-6253-4DC9-B9C1-5E9104774426}"/>
+                <a16:creationId xmlns:a16="http://schemas.microsoft.com/office/drawing/2014/main" id="{2C46BBC7-79A4-4DD4-9E9C-03A749DFF1A2}"/>
               </a:ext>
             </a:extLst>
           </p:cNvPr>
@@ -4083,7 +4083,7 @@
           <p:cNvPr id="17" name="">
             <a:extLst xmlns:a="http://schemas.openxmlformats.org/drawingml/2006/main">
               <a:ext uri="{FF2B5EF4-FFF2-40B4-BE49-F238E27FC236}">
-                <a16:creationId xmlns:a16="http://schemas.microsoft.com/office/drawing/2014/main" id="{AC55159B-D0A1-4680-9FF0-F1DAF6F18BFD}"/>
+                <a16:creationId xmlns:a16="http://schemas.microsoft.com/office/drawing/2014/main" id="{1C2AEC28-502E-4FA5-B2C1-ABEF5F5E2A86}"/>
               </a:ext>
             </a:extLst>
           </p:cNvPr>
@@ -4140,7 +4140,7 @@
           <p:cNvPr id="18" name="">
             <a:extLst xmlns:a="http://schemas.openxmlformats.org/drawingml/2006/main">
               <a:ext uri="{FF2B5EF4-FFF2-40B4-BE49-F238E27FC236}">
-                <a16:creationId xmlns:a16="http://schemas.microsoft.com/office/drawing/2014/main" id="{13438FCE-D4E5-48DA-B401-C1BC59EF4DA6}"/>
+                <a16:creationId xmlns:a16="http://schemas.microsoft.com/office/drawing/2014/main" id="{932706EB-7717-4149-9F7A-54D3CD3B579E}"/>
               </a:ext>
             </a:extLst>
           </p:cNvPr>
@@ -4195,7 +4195,7 @@
     </p:spTree>
     <p:extLst>
       <p:ext uri="{BB962C8B-B14F-4D97-AF65-F5344CB8AC3E}">
-        <p14:creationId xmlns:p14="http://schemas.microsoft.com/office/powerpoint/2010/main" val="97442007"/>
+        <p14:creationId xmlns:p14="http://schemas.microsoft.com/office/powerpoint/2010/main" val="258965402"/>
       </p:ext>
     </p:extLst>
   </p:cSld>
@@ -4350,7 +4350,7 @@
           <p:cNvPr id="23" name="">
             <a:extLst xmlns:a="http://schemas.openxmlformats.org/drawingml/2006/main">
               <a:ext uri="{FF2B5EF4-FFF2-40B4-BE49-F238E27FC236}">
-                <a16:creationId xmlns:a16="http://schemas.microsoft.com/office/drawing/2014/main" id="{48104841-2308-4B77-BC79-9EF8C6E72AC2}"/>
+                <a16:creationId xmlns:a16="http://schemas.microsoft.com/office/drawing/2014/main" id="{CB5B5A64-638D-44D1-95E1-06D22EA973C7}"/>
               </a:ext>
             </a:extLst>
           </p:cNvPr>
@@ -4382,7 +4382,7 @@
           <p:cNvPr id="2" name="">
             <a:extLst xmlns:a="http://schemas.openxmlformats.org/drawingml/2006/main">
               <a:ext uri="{FF2B5EF4-FFF2-40B4-BE49-F238E27FC236}">
-                <a16:creationId xmlns:a16="http://schemas.microsoft.com/office/drawing/2014/main" id="{F1BADC56-E633-4B28-9262-863DCC559EB1}"/>
+                <a16:creationId xmlns:a16="http://schemas.microsoft.com/office/drawing/2014/main" id="{58FCF482-7AD9-41EE-931C-4631B3A948EC}"/>
               </a:ext>
             </a:extLst>
           </p:cNvPr>
@@ -4439,7 +4439,7 @@
           <p:cNvPr id="3" name="">
             <a:extLst xmlns:a="http://schemas.openxmlformats.org/drawingml/2006/main">
               <a:ext uri="{FF2B5EF4-FFF2-40B4-BE49-F238E27FC236}">
-                <a16:creationId xmlns:a16="http://schemas.microsoft.com/office/drawing/2014/main" id="{6BFCC821-9194-4C9F-9C0E-B496F8863DF5}"/>
+                <a16:creationId xmlns:a16="http://schemas.microsoft.com/office/drawing/2014/main" id="{5FD08578-6226-43AE-B4F3-949DDE5BF3EE}"/>
               </a:ext>
             </a:extLst>
           </p:cNvPr>
@@ -4471,7 +4471,7 @@
           <p:cNvPr id="4" name="">
             <a:extLst xmlns:a="http://schemas.openxmlformats.org/drawingml/2006/main">
               <a:ext uri="{FF2B5EF4-FFF2-40B4-BE49-F238E27FC236}">
-                <a16:creationId xmlns:a16="http://schemas.microsoft.com/office/drawing/2014/main" id="{3ACAE9A6-9035-4EAD-81E6-A25820906D3E}"/>
+                <a16:creationId xmlns:a16="http://schemas.microsoft.com/office/drawing/2014/main" id="{4F8206AC-0636-4193-8A60-E47C615793DD}"/>
               </a:ext>
             </a:extLst>
           </p:cNvPr>
@@ -4528,7 +4528,7 @@
           <p:cNvPr id="5" name="">
             <a:extLst xmlns:a="http://schemas.openxmlformats.org/drawingml/2006/main">
               <a:ext uri="{FF2B5EF4-FFF2-40B4-BE49-F238E27FC236}">
-                <a16:creationId xmlns:a16="http://schemas.microsoft.com/office/drawing/2014/main" id="{3F55AABC-F7D6-494D-924B-9B11551A7108}"/>
+                <a16:creationId xmlns:a16="http://schemas.microsoft.com/office/drawing/2014/main" id="{C099729B-F8A7-4CD2-B0A2-B31B25D12513}"/>
               </a:ext>
             </a:extLst>
           </p:cNvPr>
@@ -4585,7 +4585,7 @@
           <p:cNvPr id="6" name="">
             <a:extLst xmlns:a="http://schemas.openxmlformats.org/drawingml/2006/main">
               <a:ext uri="{FF2B5EF4-FFF2-40B4-BE49-F238E27FC236}">
-                <a16:creationId xmlns:a16="http://schemas.microsoft.com/office/drawing/2014/main" id="{0D85DA99-809E-4E99-83C3-95AFEF35C19C}"/>
+                <a16:creationId xmlns:a16="http://schemas.microsoft.com/office/drawing/2014/main" id="{8712D8D6-4AD5-49BF-B872-F5924CE65D33}"/>
               </a:ext>
             </a:extLst>
           </p:cNvPr>
@@ -4642,7 +4642,7 @@
           <p:cNvPr id="7" name="">
             <a:extLst xmlns:a="http://schemas.openxmlformats.org/drawingml/2006/main">
               <a:ext uri="{FF2B5EF4-FFF2-40B4-BE49-F238E27FC236}">
-                <a16:creationId xmlns:a16="http://schemas.microsoft.com/office/drawing/2014/main" id="{FBC9DC22-962D-433C-8149-1B2DAED4A515}"/>
+                <a16:creationId xmlns:a16="http://schemas.microsoft.com/office/drawing/2014/main" id="{44035CC2-DE18-4EA5-A1F3-7B8456D1C85D}"/>
               </a:ext>
             </a:extLst>
           </p:cNvPr>
@@ -4674,7 +4674,7 @@
           <p:cNvPr id="8" name="">
             <a:extLst xmlns:a="http://schemas.openxmlformats.org/drawingml/2006/main">
               <a:ext uri="{FF2B5EF4-FFF2-40B4-BE49-F238E27FC236}">
-                <a16:creationId xmlns:a16="http://schemas.microsoft.com/office/drawing/2014/main" id="{87C07B73-6825-4A6C-872C-1621228E0DE6}"/>
+                <a16:creationId xmlns:a16="http://schemas.microsoft.com/office/drawing/2014/main" id="{08C39C03-B920-4846-B844-B9864C56B319}"/>
               </a:ext>
             </a:extLst>
           </p:cNvPr>
@@ -4731,7 +4731,7 @@
           <p:cNvPr id="9" name="">
             <a:extLst xmlns:a="http://schemas.openxmlformats.org/drawingml/2006/main">
               <a:ext uri="{FF2B5EF4-FFF2-40B4-BE49-F238E27FC236}">
-                <a16:creationId xmlns:a16="http://schemas.microsoft.com/office/drawing/2014/main" id="{2A976EF0-5369-45B8-A971-263E4FF92AF0}"/>
+                <a16:creationId xmlns:a16="http://schemas.microsoft.com/office/drawing/2014/main" id="{D283DC32-653A-44DD-9022-F93197B8A77B}"/>
               </a:ext>
             </a:extLst>
           </p:cNvPr>
@@ -4788,7 +4788,7 @@
           <p:cNvPr id="10" name="">
             <a:extLst xmlns:a="http://schemas.openxmlformats.org/drawingml/2006/main">
               <a:ext uri="{FF2B5EF4-FFF2-40B4-BE49-F238E27FC236}">
-                <a16:creationId xmlns:a16="http://schemas.microsoft.com/office/drawing/2014/main" id="{69635AFF-F766-4EC9-AC4B-FECFDDE20B2F}"/>
+                <a16:creationId xmlns:a16="http://schemas.microsoft.com/office/drawing/2014/main" id="{21F95BD2-B6A9-4F14-8748-E6FC1992CAD2}"/>
               </a:ext>
             </a:extLst>
           </p:cNvPr>
@@ -4822,7 +4822,7 @@
           <p:cNvPr id="11" name="">
             <a:extLst xmlns:a="http://schemas.openxmlformats.org/drawingml/2006/main">
               <a:ext uri="{FF2B5EF4-FFF2-40B4-BE49-F238E27FC236}">
-                <a16:creationId xmlns:a16="http://schemas.microsoft.com/office/drawing/2014/main" id="{4C01C385-8C07-4275-9A9D-3B2771F65A00}"/>
+                <a16:creationId xmlns:a16="http://schemas.microsoft.com/office/drawing/2014/main" id="{164AEBD6-B280-4B7E-8264-0F5232D5B2A8}"/>
               </a:ext>
             </a:extLst>
           </p:cNvPr>
@@ -4854,7 +4854,7 @@
           <p:cNvPr id="12" name="">
             <a:extLst xmlns:a="http://schemas.openxmlformats.org/drawingml/2006/main">
               <a:ext uri="{FF2B5EF4-FFF2-40B4-BE49-F238E27FC236}">
-                <a16:creationId xmlns:a16="http://schemas.microsoft.com/office/drawing/2014/main" id="{1B427597-ECAC-4D54-B939-1759BE6E5D7A}"/>
+                <a16:creationId xmlns:a16="http://schemas.microsoft.com/office/drawing/2014/main" id="{F77A2E74-F0F2-455D-911B-2A6E2F19FAA6}"/>
               </a:ext>
             </a:extLst>
           </p:cNvPr>
@@ -4911,7 +4911,7 @@
           <p:cNvPr id="13" name="">
             <a:extLst xmlns:a="http://schemas.openxmlformats.org/drawingml/2006/main">
               <a:ext uri="{FF2B5EF4-FFF2-40B4-BE49-F238E27FC236}">
-                <a16:creationId xmlns:a16="http://schemas.microsoft.com/office/drawing/2014/main" id="{0721D344-BF20-4006-9532-0AA6B84E7106}"/>
+                <a16:creationId xmlns:a16="http://schemas.microsoft.com/office/drawing/2014/main" id="{CDBE3F1C-5899-450F-BF44-8E697B6748A8}"/>
               </a:ext>
             </a:extLst>
           </p:cNvPr>
@@ -4968,7 +4968,7 @@
           <p:cNvPr id="14" name="">
             <a:extLst xmlns:a="http://schemas.openxmlformats.org/drawingml/2006/main">
               <a:ext uri="{FF2B5EF4-FFF2-40B4-BE49-F238E27FC236}">
-                <a16:creationId xmlns:a16="http://schemas.microsoft.com/office/drawing/2014/main" id="{8E5A2AC0-32A7-41E0-B913-1D4559053F3C}"/>
+                <a16:creationId xmlns:a16="http://schemas.microsoft.com/office/drawing/2014/main" id="{DA0CB3A9-46C7-45F5-9434-3BB8BE53FEC0}"/>
               </a:ext>
             </a:extLst>
           </p:cNvPr>
@@ -5002,7 +5002,7 @@
           <p:cNvPr id="15" name="">
             <a:extLst xmlns:a="http://schemas.openxmlformats.org/drawingml/2006/main">
               <a:ext uri="{FF2B5EF4-FFF2-40B4-BE49-F238E27FC236}">
-                <a16:creationId xmlns:a16="http://schemas.microsoft.com/office/drawing/2014/main" id="{8EAB8CAE-AE25-4D3A-A8D7-5FEEECCDF62A}"/>
+                <a16:creationId xmlns:a16="http://schemas.microsoft.com/office/drawing/2014/main" id="{ACFB35C9-72BD-496C-824A-12E29DB97FC3}"/>
               </a:ext>
             </a:extLst>
           </p:cNvPr>
@@ -5034,7 +5034,7 @@
           <p:cNvPr id="16" name="">
             <a:extLst xmlns:a="http://schemas.openxmlformats.org/drawingml/2006/main">
               <a:ext uri="{FF2B5EF4-FFF2-40B4-BE49-F238E27FC236}">
-                <a16:creationId xmlns:a16="http://schemas.microsoft.com/office/drawing/2014/main" id="{760C63BF-6056-474E-A9E7-29ABB0F374B5}"/>
+                <a16:creationId xmlns:a16="http://schemas.microsoft.com/office/drawing/2014/main" id="{8A8285ED-8A61-442D-BF4C-8820A2D7ADEB}"/>
               </a:ext>
             </a:extLst>
           </p:cNvPr>
@@ -5091,7 +5091,7 @@
           <p:cNvPr id="17" name="">
             <a:extLst xmlns:a="http://schemas.openxmlformats.org/drawingml/2006/main">
               <a:ext uri="{FF2B5EF4-FFF2-40B4-BE49-F238E27FC236}">
-                <a16:creationId xmlns:a16="http://schemas.microsoft.com/office/drawing/2014/main" id="{7FE9CD9B-7630-4095-8805-387EA769785B}"/>
+                <a16:creationId xmlns:a16="http://schemas.microsoft.com/office/drawing/2014/main" id="{54A7D1FC-DCB4-41A9-91BC-4A8A380F58A3}"/>
               </a:ext>
             </a:extLst>
           </p:cNvPr>
@@ -5148,7 +5148,7 @@
           <p:cNvPr id="18" name="">
             <a:extLst xmlns:a="http://schemas.openxmlformats.org/drawingml/2006/main">
               <a:ext uri="{FF2B5EF4-FFF2-40B4-BE49-F238E27FC236}">
-                <a16:creationId xmlns:a16="http://schemas.microsoft.com/office/drawing/2014/main" id="{A975F5D4-732F-4BDC-BDE9-7040B30A1917}"/>
+                <a16:creationId xmlns:a16="http://schemas.microsoft.com/office/drawing/2014/main" id="{D46A02E8-CD51-4866-BB49-9681DE71CEC3}"/>
               </a:ext>
             </a:extLst>
           </p:cNvPr>
@@ -5182,7 +5182,7 @@
           <p:cNvPr id="19" name="">
             <a:extLst xmlns:a="http://schemas.openxmlformats.org/drawingml/2006/main">
               <a:ext uri="{FF2B5EF4-FFF2-40B4-BE49-F238E27FC236}">
-                <a16:creationId xmlns:a16="http://schemas.microsoft.com/office/drawing/2014/main" id="{A8F1C28F-B6EE-4B5B-A6F1-00878888D5FA}"/>
+                <a16:creationId xmlns:a16="http://schemas.microsoft.com/office/drawing/2014/main" id="{5186EAAC-253F-4362-B922-49B77534AC58}"/>
               </a:ext>
             </a:extLst>
           </p:cNvPr>
@@ -5214,7 +5214,7 @@
           <p:cNvPr id="20" name="">
             <a:extLst xmlns:a="http://schemas.openxmlformats.org/drawingml/2006/main">
               <a:ext uri="{FF2B5EF4-FFF2-40B4-BE49-F238E27FC236}">
-                <a16:creationId xmlns:a16="http://schemas.microsoft.com/office/drawing/2014/main" id="{850235E0-E21A-4878-93B3-B09AFCB50D05}"/>
+                <a16:creationId xmlns:a16="http://schemas.microsoft.com/office/drawing/2014/main" id="{3FAF08D0-EEE5-48A3-BE61-8D91FE083CB1}"/>
               </a:ext>
             </a:extLst>
           </p:cNvPr>
@@ -5271,7 +5271,7 @@
           <p:cNvPr id="21" name="">
             <a:extLst xmlns:a="http://schemas.openxmlformats.org/drawingml/2006/main">
               <a:ext uri="{FF2B5EF4-FFF2-40B4-BE49-F238E27FC236}">
-                <a16:creationId xmlns:a16="http://schemas.microsoft.com/office/drawing/2014/main" id="{80680F33-57D5-4070-88EC-D1E6E4258515}"/>
+                <a16:creationId xmlns:a16="http://schemas.microsoft.com/office/drawing/2014/main" id="{4E0801B3-0561-4836-B310-E3A30C3181A9}"/>
               </a:ext>
             </a:extLst>
           </p:cNvPr>
@@ -5328,7 +5328,7 @@
           <p:cNvPr id="22" name="">
             <a:extLst xmlns:a="http://schemas.openxmlformats.org/drawingml/2006/main">
               <a:ext uri="{FF2B5EF4-FFF2-40B4-BE49-F238E27FC236}">
-                <a16:creationId xmlns:a16="http://schemas.microsoft.com/office/drawing/2014/main" id="{8F51394E-76B4-4DCF-A668-18E69190510F}"/>
+                <a16:creationId xmlns:a16="http://schemas.microsoft.com/office/drawing/2014/main" id="{FF816907-EC10-438C-B859-EB27AD3B86B9}"/>
               </a:ext>
             </a:extLst>
           </p:cNvPr>
@@ -5383,7 +5383,7 @@
     </p:spTree>
     <p:extLst>
       <p:ext uri="{BB962C8B-B14F-4D97-AF65-F5344CB8AC3E}">
-        <p14:creationId xmlns:p14="http://schemas.microsoft.com/office/powerpoint/2010/main" val="653232911"/>
+        <p14:creationId xmlns:p14="http://schemas.microsoft.com/office/powerpoint/2010/main" val="1302505289"/>
       </p:ext>
     </p:extLst>
   </p:cSld>
@@ -5584,7 +5584,7 @@
           <p:cNvPr id="23" name="">
             <a:extLst xmlns:a="http://schemas.openxmlformats.org/drawingml/2006/main">
               <a:ext uri="{FF2B5EF4-FFF2-40B4-BE49-F238E27FC236}">
-                <a16:creationId xmlns:a16="http://schemas.microsoft.com/office/drawing/2014/main" id="{3AC49F80-441F-47AF-A9FB-080E64950A02}"/>
+                <a16:creationId xmlns:a16="http://schemas.microsoft.com/office/drawing/2014/main" id="{40533067-57AA-4DA2-8856-AF740F3D4632}"/>
               </a:ext>
             </a:extLst>
           </p:cNvPr>
@@ -5616,7 +5616,7 @@
           <p:cNvPr id="2" name="">
             <a:extLst xmlns:a="http://schemas.openxmlformats.org/drawingml/2006/main">
               <a:ext uri="{FF2B5EF4-FFF2-40B4-BE49-F238E27FC236}">
-                <a16:creationId xmlns:a16="http://schemas.microsoft.com/office/drawing/2014/main" id="{10FF5834-E48F-4E33-A48A-B5C0FAE3AC24}"/>
+                <a16:creationId xmlns:a16="http://schemas.microsoft.com/office/drawing/2014/main" id="{96359A54-7284-4258-A95A-757390F0B687}"/>
               </a:ext>
             </a:extLst>
           </p:cNvPr>
@@ -5673,7 +5673,7 @@
           <p:cNvPr id="3" name="">
             <a:extLst xmlns:a="http://schemas.openxmlformats.org/drawingml/2006/main">
               <a:ext uri="{FF2B5EF4-FFF2-40B4-BE49-F238E27FC236}">
-                <a16:creationId xmlns:a16="http://schemas.microsoft.com/office/drawing/2014/main" id="{DA808035-5563-4BA7-8CAE-AEFCF155924B}"/>
+                <a16:creationId xmlns:a16="http://schemas.microsoft.com/office/drawing/2014/main" id="{B3F9E6D0-4B39-469C-ACFF-2AE5ABA07F02}"/>
               </a:ext>
             </a:extLst>
           </p:cNvPr>
@@ -5705,7 +5705,7 @@
           <p:cNvPr id="4" name="">
             <a:extLst xmlns:a="http://schemas.openxmlformats.org/drawingml/2006/main">
               <a:ext uri="{FF2B5EF4-FFF2-40B4-BE49-F238E27FC236}">
-                <a16:creationId xmlns:a16="http://schemas.microsoft.com/office/drawing/2014/main" id="{403267C4-E0BE-4983-AC6F-56AA2ABE741F}"/>
+                <a16:creationId xmlns:a16="http://schemas.microsoft.com/office/drawing/2014/main" id="{DBE104C3-E421-4E6D-A0E3-5BD023BFF7A1}"/>
               </a:ext>
             </a:extLst>
           </p:cNvPr>
@@ -5762,7 +5762,7 @@
           <p:cNvPr id="5" name="">
             <a:extLst xmlns:a="http://schemas.openxmlformats.org/drawingml/2006/main">
               <a:ext uri="{FF2B5EF4-FFF2-40B4-BE49-F238E27FC236}">
-                <a16:creationId xmlns:a16="http://schemas.microsoft.com/office/drawing/2014/main" id="{E7E8B536-EEE3-4CDA-B719-8B4A9F0AF783}"/>
+                <a16:creationId xmlns:a16="http://schemas.microsoft.com/office/drawing/2014/main" id="{17CB8759-E037-4277-B0A3-D2F1719B0B7B}"/>
               </a:ext>
             </a:extLst>
           </p:cNvPr>
@@ -5819,7 +5819,7 @@
           <p:cNvPr id="6" name="">
             <a:extLst xmlns:a="http://schemas.openxmlformats.org/drawingml/2006/main">
               <a:ext uri="{FF2B5EF4-FFF2-40B4-BE49-F238E27FC236}">
-                <a16:creationId xmlns:a16="http://schemas.microsoft.com/office/drawing/2014/main" id="{86D05AB8-6A5B-451A-B8F3-0FC7BF32ACB6}"/>
+                <a16:creationId xmlns:a16="http://schemas.microsoft.com/office/drawing/2014/main" id="{6079AE81-0DF4-44D7-AAEB-EE7AAAC460BC}"/>
               </a:ext>
             </a:extLst>
           </p:cNvPr>
@@ -5876,7 +5876,7 @@
           <p:cNvPr id="7" name="">
             <a:extLst xmlns:a="http://schemas.openxmlformats.org/drawingml/2006/main">
               <a:ext uri="{FF2B5EF4-FFF2-40B4-BE49-F238E27FC236}">
-                <a16:creationId xmlns:a16="http://schemas.microsoft.com/office/drawing/2014/main" id="{097A56B9-0238-407C-AFE4-5269D2352F6C}"/>
+                <a16:creationId xmlns:a16="http://schemas.microsoft.com/office/drawing/2014/main" id="{BF8032C4-FF97-41CC-8369-026722F4B02C}"/>
               </a:ext>
             </a:extLst>
           </p:cNvPr>
@@ -5908,7 +5908,7 @@
           <p:cNvPr id="8" name="">
             <a:extLst xmlns:a="http://schemas.openxmlformats.org/drawingml/2006/main">
               <a:ext uri="{FF2B5EF4-FFF2-40B4-BE49-F238E27FC236}">
-                <a16:creationId xmlns:a16="http://schemas.microsoft.com/office/drawing/2014/main" id="{84BF462E-1EA0-4B61-9D9C-6B266AEBD327}"/>
+                <a16:creationId xmlns:a16="http://schemas.microsoft.com/office/drawing/2014/main" id="{C4129AA4-D8AA-4589-8654-9CB9B1436192}"/>
               </a:ext>
             </a:extLst>
           </p:cNvPr>
@@ -5965,7 +5965,7 @@
           <p:cNvPr id="9" name="">
             <a:extLst xmlns:a="http://schemas.openxmlformats.org/drawingml/2006/main">
               <a:ext uri="{FF2B5EF4-FFF2-40B4-BE49-F238E27FC236}">
-                <a16:creationId xmlns:a16="http://schemas.microsoft.com/office/drawing/2014/main" id="{9D417207-9AA6-42B0-934F-C36F935C6579}"/>
+                <a16:creationId xmlns:a16="http://schemas.microsoft.com/office/drawing/2014/main" id="{AA4E5B41-D808-463A-A031-C7DD8AC2AFB2}"/>
               </a:ext>
             </a:extLst>
           </p:cNvPr>
@@ -6022,7 +6022,7 @@
           <p:cNvPr id="10" name="">
             <a:extLst xmlns:a="http://schemas.openxmlformats.org/drawingml/2006/main">
               <a:ext uri="{FF2B5EF4-FFF2-40B4-BE49-F238E27FC236}">
-                <a16:creationId xmlns:a16="http://schemas.microsoft.com/office/drawing/2014/main" id="{C5952CEB-E592-40D5-B50C-8170DA45837F}"/>
+                <a16:creationId xmlns:a16="http://schemas.microsoft.com/office/drawing/2014/main" id="{30ABAB49-C032-44F4-A32B-5CACFE6F1969}"/>
               </a:ext>
             </a:extLst>
           </p:cNvPr>
@@ -6056,7 +6056,7 @@
           <p:cNvPr id="11" name="">
             <a:extLst xmlns:a="http://schemas.openxmlformats.org/drawingml/2006/main">
               <a:ext uri="{FF2B5EF4-FFF2-40B4-BE49-F238E27FC236}">
-                <a16:creationId xmlns:a16="http://schemas.microsoft.com/office/drawing/2014/main" id="{7BED973F-C4EF-40D7-8897-B4327FF4CDDD}"/>
+                <a16:creationId xmlns:a16="http://schemas.microsoft.com/office/drawing/2014/main" id="{E83071C7-45AD-4EB9-B792-7CEFAFE8F00F}"/>
               </a:ext>
             </a:extLst>
           </p:cNvPr>
@@ -6088,7 +6088,7 @@
           <p:cNvPr id="12" name="">
             <a:extLst xmlns:a="http://schemas.openxmlformats.org/drawingml/2006/main">
               <a:ext uri="{FF2B5EF4-FFF2-40B4-BE49-F238E27FC236}">
-                <a16:creationId xmlns:a16="http://schemas.microsoft.com/office/drawing/2014/main" id="{971AFC91-6128-4CD1-81F2-DF1C5DAD9075}"/>
+                <a16:creationId xmlns:a16="http://schemas.microsoft.com/office/drawing/2014/main" id="{16CCAA6D-AF46-425A-B84B-A4BE8AE7981A}"/>
               </a:ext>
             </a:extLst>
           </p:cNvPr>
@@ -6145,7 +6145,7 @@
           <p:cNvPr id="13" name="">
             <a:extLst xmlns:a="http://schemas.openxmlformats.org/drawingml/2006/main">
               <a:ext uri="{FF2B5EF4-FFF2-40B4-BE49-F238E27FC236}">
-                <a16:creationId xmlns:a16="http://schemas.microsoft.com/office/drawing/2014/main" id="{3A9D26A0-6E9A-45DC-A4A8-2FCF21E326FB}"/>
+                <a16:creationId xmlns:a16="http://schemas.microsoft.com/office/drawing/2014/main" id="{A85099E5-4BB9-4788-B8E1-8631826B1BF0}"/>
               </a:ext>
             </a:extLst>
           </p:cNvPr>
@@ -6202,7 +6202,7 @@
           <p:cNvPr id="14" name="">
             <a:extLst xmlns:a="http://schemas.openxmlformats.org/drawingml/2006/main">
               <a:ext uri="{FF2B5EF4-FFF2-40B4-BE49-F238E27FC236}">
-                <a16:creationId xmlns:a16="http://schemas.microsoft.com/office/drawing/2014/main" id="{E3F8BAA1-FD06-44DA-B2B0-80762D391E3E}"/>
+                <a16:creationId xmlns:a16="http://schemas.microsoft.com/office/drawing/2014/main" id="{C1590888-3FD9-4D79-AD22-2CC66D7282AF}"/>
               </a:ext>
             </a:extLst>
           </p:cNvPr>
@@ -6236,7 +6236,7 @@
           <p:cNvPr id="15" name="">
             <a:extLst xmlns:a="http://schemas.openxmlformats.org/drawingml/2006/main">
               <a:ext uri="{FF2B5EF4-FFF2-40B4-BE49-F238E27FC236}">
-                <a16:creationId xmlns:a16="http://schemas.microsoft.com/office/drawing/2014/main" id="{1A3AD904-2246-45C5-8B58-49110EA17FA8}"/>
+                <a16:creationId xmlns:a16="http://schemas.microsoft.com/office/drawing/2014/main" id="{01F22035-BAD7-48C1-B379-AF910838FBB9}"/>
               </a:ext>
             </a:extLst>
           </p:cNvPr>
@@ -6268,7 +6268,7 @@
           <p:cNvPr id="16" name="">
             <a:extLst xmlns:a="http://schemas.openxmlformats.org/drawingml/2006/main">
               <a:ext uri="{FF2B5EF4-FFF2-40B4-BE49-F238E27FC236}">
-                <a16:creationId xmlns:a16="http://schemas.microsoft.com/office/drawing/2014/main" id="{0BA853D8-9AED-48CF-B117-51403065F6F7}"/>
+                <a16:creationId xmlns:a16="http://schemas.microsoft.com/office/drawing/2014/main" id="{0B22B65C-09DB-4ABC-8E24-0257DF0C7218}"/>
               </a:ext>
             </a:extLst>
           </p:cNvPr>
@@ -6325,7 +6325,7 @@
           <p:cNvPr id="17" name="">
             <a:extLst xmlns:a="http://schemas.openxmlformats.org/drawingml/2006/main">
               <a:ext uri="{FF2B5EF4-FFF2-40B4-BE49-F238E27FC236}">
-                <a16:creationId xmlns:a16="http://schemas.microsoft.com/office/drawing/2014/main" id="{EF3EECE2-FE98-4145-8BA4-5A1251D776B0}"/>
+                <a16:creationId xmlns:a16="http://schemas.microsoft.com/office/drawing/2014/main" id="{26FDF56C-F19C-44CF-AEDC-38B05F0C5BEB}"/>
               </a:ext>
             </a:extLst>
           </p:cNvPr>
@@ -6382,7 +6382,7 @@
           <p:cNvPr id="18" name="">
             <a:extLst xmlns:a="http://schemas.openxmlformats.org/drawingml/2006/main">
               <a:ext uri="{FF2B5EF4-FFF2-40B4-BE49-F238E27FC236}">
-                <a16:creationId xmlns:a16="http://schemas.microsoft.com/office/drawing/2014/main" id="{85E525C8-C1EC-4F64-A578-623DE622247E}"/>
+                <a16:creationId xmlns:a16="http://schemas.microsoft.com/office/drawing/2014/main" id="{B7C61775-B71E-4BDA-A54C-029BF20588C4}"/>
               </a:ext>
             </a:extLst>
           </p:cNvPr>
@@ -6416,7 +6416,7 @@
           <p:cNvPr id="19" name="">
             <a:extLst xmlns:a="http://schemas.openxmlformats.org/drawingml/2006/main">
               <a:ext uri="{FF2B5EF4-FFF2-40B4-BE49-F238E27FC236}">
-                <a16:creationId xmlns:a16="http://schemas.microsoft.com/office/drawing/2014/main" id="{686DDA0D-10E8-4E43-A26E-394D603D1179}"/>
+                <a16:creationId xmlns:a16="http://schemas.microsoft.com/office/drawing/2014/main" id="{68B6D984-1E7C-4775-9133-6FAE0E5617B2}"/>
               </a:ext>
             </a:extLst>
           </p:cNvPr>
@@ -6448,7 +6448,7 @@
           <p:cNvPr id="20" name="">
             <a:extLst xmlns:a="http://schemas.openxmlformats.org/drawingml/2006/main">
               <a:ext uri="{FF2B5EF4-FFF2-40B4-BE49-F238E27FC236}">
-                <a16:creationId xmlns:a16="http://schemas.microsoft.com/office/drawing/2014/main" id="{3B80857C-5118-4AAD-A235-0A7BB7ADC694}"/>
+                <a16:creationId xmlns:a16="http://schemas.microsoft.com/office/drawing/2014/main" id="{9183D19C-9003-4309-A733-59594D73E823}"/>
               </a:ext>
             </a:extLst>
           </p:cNvPr>
@@ -6505,7 +6505,7 @@
           <p:cNvPr id="21" name="">
             <a:extLst xmlns:a="http://schemas.openxmlformats.org/drawingml/2006/main">
               <a:ext uri="{FF2B5EF4-FFF2-40B4-BE49-F238E27FC236}">
-                <a16:creationId xmlns:a16="http://schemas.microsoft.com/office/drawing/2014/main" id="{DFA88ACD-0328-4806-9424-C3BC8072CD89}"/>
+                <a16:creationId xmlns:a16="http://schemas.microsoft.com/office/drawing/2014/main" id="{FD7AF2DE-46FF-4793-9E92-418BF3926AFD}"/>
               </a:ext>
             </a:extLst>
           </p:cNvPr>
@@ -6562,7 +6562,7 @@
           <p:cNvPr id="22" name="">
             <a:extLst xmlns:a="http://schemas.openxmlformats.org/drawingml/2006/main">
               <a:ext uri="{FF2B5EF4-FFF2-40B4-BE49-F238E27FC236}">
-                <a16:creationId xmlns:a16="http://schemas.microsoft.com/office/drawing/2014/main" id="{11B99BE2-A30D-4A18-82CE-3D80211B570A}"/>
+                <a16:creationId xmlns:a16="http://schemas.microsoft.com/office/drawing/2014/main" id="{C46D24AD-3BA8-47CF-8E37-FE2F9C6F4D07}"/>
               </a:ext>
             </a:extLst>
           </p:cNvPr>
@@ -6617,7 +6617,7 @@
     </p:spTree>
     <p:extLst>
       <p:ext uri="{BB962C8B-B14F-4D97-AF65-F5344CB8AC3E}">
-        <p14:creationId xmlns:p14="http://schemas.microsoft.com/office/powerpoint/2010/main" val="284521221"/>
+        <p14:creationId xmlns:p14="http://schemas.microsoft.com/office/powerpoint/2010/main" val="881501166"/>
       </p:ext>
     </p:extLst>
   </p:cSld>
@@ -6818,7 +6818,7 @@
           <p:cNvPr id="16" name="">
             <a:extLst xmlns:a="http://schemas.openxmlformats.org/drawingml/2006/main">
               <a:ext uri="{FF2B5EF4-FFF2-40B4-BE49-F238E27FC236}">
-                <a16:creationId xmlns:a16="http://schemas.microsoft.com/office/drawing/2014/main" id="{EF3C0634-3FB3-4498-AF9E-E00328205F78}"/>
+                <a16:creationId xmlns:a16="http://schemas.microsoft.com/office/drawing/2014/main" id="{4928AD1D-2EE6-4DFE-A6A0-A3701A40381E}"/>
               </a:ext>
             </a:extLst>
           </p:cNvPr>
@@ -6850,7 +6850,7 @@
           <p:cNvPr id="2" name="">
             <a:extLst xmlns:a="http://schemas.openxmlformats.org/drawingml/2006/main">
               <a:ext uri="{FF2B5EF4-FFF2-40B4-BE49-F238E27FC236}">
-                <a16:creationId xmlns:a16="http://schemas.microsoft.com/office/drawing/2014/main" id="{D9C829FE-55AF-4BA2-B3EA-61F552D100B6}"/>
+                <a16:creationId xmlns:a16="http://schemas.microsoft.com/office/drawing/2014/main" id="{0214F85D-7463-42E5-A78D-501DDE01C0DD}"/>
               </a:ext>
             </a:extLst>
           </p:cNvPr>
@@ -6907,7 +6907,7 @@
           <p:cNvPr id="3" name="">
             <a:extLst xmlns:a="http://schemas.openxmlformats.org/drawingml/2006/main">
               <a:ext uri="{FF2B5EF4-FFF2-40B4-BE49-F238E27FC236}">
-                <a16:creationId xmlns:a16="http://schemas.microsoft.com/office/drawing/2014/main" id="{676042A0-9119-4B55-B2D9-B9A27A2B7C9E}"/>
+                <a16:creationId xmlns:a16="http://schemas.microsoft.com/office/drawing/2014/main" id="{E88F1B6B-AA55-4FAB-8DAE-7DE3AEFF2AB6}"/>
               </a:ext>
             </a:extLst>
           </p:cNvPr>
@@ -6939,7 +6939,7 @@
           <p:cNvPr id="4" name="">
             <a:extLst xmlns:a="http://schemas.openxmlformats.org/drawingml/2006/main">
               <a:ext uri="{FF2B5EF4-FFF2-40B4-BE49-F238E27FC236}">
-                <a16:creationId xmlns:a16="http://schemas.microsoft.com/office/drawing/2014/main" id="{F516944F-83B6-4E36-912F-ED8424073A18}"/>
+                <a16:creationId xmlns:a16="http://schemas.microsoft.com/office/drawing/2014/main" id="{AD88FDDB-C5F9-4650-8450-46D1F3900471}"/>
               </a:ext>
             </a:extLst>
           </p:cNvPr>
@@ -6996,7 +6996,7 @@
           <p:cNvPr id="5" name="">
             <a:extLst xmlns:a="http://schemas.openxmlformats.org/drawingml/2006/main">
               <a:ext uri="{FF2B5EF4-FFF2-40B4-BE49-F238E27FC236}">
-                <a16:creationId xmlns:a16="http://schemas.microsoft.com/office/drawing/2014/main" id="{958CC391-7FE4-47A7-8741-3BE3810CE223}"/>
+                <a16:creationId xmlns:a16="http://schemas.microsoft.com/office/drawing/2014/main" id="{4FB7AF00-C1E9-4984-A59C-8FF04529C4CD}"/>
               </a:ext>
             </a:extLst>
           </p:cNvPr>
@@ -7053,7 +7053,7 @@
           <p:cNvPr id="6" name="">
             <a:extLst xmlns:a="http://schemas.openxmlformats.org/drawingml/2006/main">
               <a:ext uri="{FF2B5EF4-FFF2-40B4-BE49-F238E27FC236}">
-                <a16:creationId xmlns:a16="http://schemas.microsoft.com/office/drawing/2014/main" id="{B2064CE5-CF59-4DBF-ACF8-BD402193C09D}"/>
+                <a16:creationId xmlns:a16="http://schemas.microsoft.com/office/drawing/2014/main" id="{85CA4146-98CA-4BED-B6E1-E9D8D05D604D}"/>
               </a:ext>
             </a:extLst>
           </p:cNvPr>
@@ -7110,7 +7110,7 @@
           <p:cNvPr id="7" name="">
             <a:extLst xmlns:a="http://schemas.openxmlformats.org/drawingml/2006/main">
               <a:ext uri="{FF2B5EF4-FFF2-40B4-BE49-F238E27FC236}">
-                <a16:creationId xmlns:a16="http://schemas.microsoft.com/office/drawing/2014/main" id="{3717322C-37F5-4A4B-9C1D-5067C3E4EC33}"/>
+                <a16:creationId xmlns:a16="http://schemas.microsoft.com/office/drawing/2014/main" id="{BF8102E1-BC71-406A-B730-421B9C80909D}"/>
               </a:ext>
             </a:extLst>
           </p:cNvPr>
@@ -7142,7 +7142,7 @@
           <p:cNvPr id="8" name="">
             <a:extLst xmlns:a="http://schemas.openxmlformats.org/drawingml/2006/main">
               <a:ext uri="{FF2B5EF4-FFF2-40B4-BE49-F238E27FC236}">
-                <a16:creationId xmlns:a16="http://schemas.microsoft.com/office/drawing/2014/main" id="{15E96802-A7E9-4960-9689-45EFC253A13B}"/>
+                <a16:creationId xmlns:a16="http://schemas.microsoft.com/office/drawing/2014/main" id="{9233A6D9-E598-48B0-822E-08EC3795ED90}"/>
               </a:ext>
             </a:extLst>
           </p:cNvPr>
@@ -7199,7 +7199,7 @@
           <p:cNvPr id="9" name="">
             <a:extLst xmlns:a="http://schemas.openxmlformats.org/drawingml/2006/main">
               <a:ext uri="{FF2B5EF4-FFF2-40B4-BE49-F238E27FC236}">
-                <a16:creationId xmlns:a16="http://schemas.microsoft.com/office/drawing/2014/main" id="{D2F797F1-8EFD-4A6B-AFE3-4D1BB715F64E}"/>
+                <a16:creationId xmlns:a16="http://schemas.microsoft.com/office/drawing/2014/main" id="{B86041C6-576E-4F2A-A380-294BED57D1AE}"/>
               </a:ext>
             </a:extLst>
           </p:cNvPr>
@@ -7256,7 +7256,7 @@
           <p:cNvPr id="10" name="">
             <a:extLst xmlns:a="http://schemas.openxmlformats.org/drawingml/2006/main">
               <a:ext uri="{FF2B5EF4-FFF2-40B4-BE49-F238E27FC236}">
-                <a16:creationId xmlns:a16="http://schemas.microsoft.com/office/drawing/2014/main" id="{89A9FBA8-665F-4A5D-AD66-C4EB8354C641}"/>
+                <a16:creationId xmlns:a16="http://schemas.microsoft.com/office/drawing/2014/main" id="{C8383091-38AD-48CF-A12E-2D22546C6E7E}"/>
               </a:ext>
             </a:extLst>
           </p:cNvPr>
@@ -7313,7 +7313,7 @@
           <p:cNvPr id="11" name="">
             <a:extLst xmlns:a="http://schemas.openxmlformats.org/drawingml/2006/main">
               <a:ext uri="{FF2B5EF4-FFF2-40B4-BE49-F238E27FC236}">
-                <a16:creationId xmlns:a16="http://schemas.microsoft.com/office/drawing/2014/main" id="{B04A0B11-3509-4DA2-A7F0-103FBAC51262}"/>
+                <a16:creationId xmlns:a16="http://schemas.microsoft.com/office/drawing/2014/main" id="{F09A7362-8D1F-431B-BBE3-4F96DA15CFD0}"/>
               </a:ext>
             </a:extLst>
           </p:cNvPr>
@@ -7345,7 +7345,7 @@
           <p:cNvPr id="12" name="">
             <a:extLst xmlns:a="http://schemas.openxmlformats.org/drawingml/2006/main">
               <a:ext uri="{FF2B5EF4-FFF2-40B4-BE49-F238E27FC236}">
-                <a16:creationId xmlns:a16="http://schemas.microsoft.com/office/drawing/2014/main" id="{BD73742D-B250-4AE1-A6F9-8DB35A40DD5A}"/>
+                <a16:creationId xmlns:a16="http://schemas.microsoft.com/office/drawing/2014/main" id="{A554D645-E9B5-40DF-AADD-8F14BBE14ADA}"/>
               </a:ext>
             </a:extLst>
           </p:cNvPr>
@@ -7402,7 +7402,7 @@
           <p:cNvPr id="13" name="">
             <a:extLst xmlns:a="http://schemas.openxmlformats.org/drawingml/2006/main">
               <a:ext uri="{FF2B5EF4-FFF2-40B4-BE49-F238E27FC236}">
-                <a16:creationId xmlns:a16="http://schemas.microsoft.com/office/drawing/2014/main" id="{ED00A398-0B90-44E3-A41B-E5344FC410BA}"/>
+                <a16:creationId xmlns:a16="http://schemas.microsoft.com/office/drawing/2014/main" id="{CB493F31-66BE-43D1-ABC8-F249A88EED8A}"/>
               </a:ext>
             </a:extLst>
           </p:cNvPr>
@@ -7459,7 +7459,7 @@
           <p:cNvPr id="14" name="">
             <a:extLst xmlns:a="http://schemas.openxmlformats.org/drawingml/2006/main">
               <a:ext uri="{FF2B5EF4-FFF2-40B4-BE49-F238E27FC236}">
-                <a16:creationId xmlns:a16="http://schemas.microsoft.com/office/drawing/2014/main" id="{C5C95A37-4CBE-4ADF-82E2-03384DE8438F}"/>
+                <a16:creationId xmlns:a16="http://schemas.microsoft.com/office/drawing/2014/main" id="{4B7E3EE5-BC72-4D2E-AC9B-0DF3CCB7D383}"/>
               </a:ext>
             </a:extLst>
           </p:cNvPr>
@@ -7516,7 +7516,7 @@
           <p:cNvPr id="15" name="">
             <a:extLst xmlns:a="http://schemas.openxmlformats.org/drawingml/2006/main">
               <a:ext uri="{FF2B5EF4-FFF2-40B4-BE49-F238E27FC236}">
-                <a16:creationId xmlns:a16="http://schemas.microsoft.com/office/drawing/2014/main" id="{3A6A03E7-E9AE-4618-8CD2-5D30E21C3339}"/>
+                <a16:creationId xmlns:a16="http://schemas.microsoft.com/office/drawing/2014/main" id="{066FCBD0-7A92-4C5B-A4B6-B1A4B4194AD8}"/>
               </a:ext>
             </a:extLst>
           </p:cNvPr>
@@ -7571,7 +7571,7 @@
     </p:spTree>
     <p:extLst>
       <p:ext uri="{BB962C8B-B14F-4D97-AF65-F5344CB8AC3E}">
-        <p14:creationId xmlns:p14="http://schemas.microsoft.com/office/powerpoint/2010/main" val="807724014"/>
+        <p14:creationId xmlns:p14="http://schemas.microsoft.com/office/powerpoint/2010/main" val="444599034"/>
       </p:ext>
     </p:extLst>
   </p:cSld>
@@ -7772,7 +7772,7 @@
           <p:cNvPr id="23" name="">
             <a:extLst xmlns:a="http://schemas.openxmlformats.org/drawingml/2006/main">
               <a:ext uri="{FF2B5EF4-FFF2-40B4-BE49-F238E27FC236}">
-                <a16:creationId xmlns:a16="http://schemas.microsoft.com/office/drawing/2014/main" id="{9F75440A-C5C6-4AE0-BBE2-3FF87E8808CA}"/>
+                <a16:creationId xmlns:a16="http://schemas.microsoft.com/office/drawing/2014/main" id="{89D9D646-4793-49F2-9001-6827C3053263}"/>
               </a:ext>
             </a:extLst>
           </p:cNvPr>
@@ -7804,7 +7804,7 @@
           <p:cNvPr id="2" name="">
             <a:extLst xmlns:a="http://schemas.openxmlformats.org/drawingml/2006/main">
               <a:ext uri="{FF2B5EF4-FFF2-40B4-BE49-F238E27FC236}">
-                <a16:creationId xmlns:a16="http://schemas.microsoft.com/office/drawing/2014/main" id="{990B5534-372C-48A0-9605-42981F5470F5}"/>
+                <a16:creationId xmlns:a16="http://schemas.microsoft.com/office/drawing/2014/main" id="{7DA3C824-841B-4BD4-83A5-0AAE01441C44}"/>
               </a:ext>
             </a:extLst>
           </p:cNvPr>
@@ -7861,7 +7861,7 @@
           <p:cNvPr id="3" name="">
             <a:extLst xmlns:a="http://schemas.openxmlformats.org/drawingml/2006/main">
               <a:ext uri="{FF2B5EF4-FFF2-40B4-BE49-F238E27FC236}">
-                <a16:creationId xmlns:a16="http://schemas.microsoft.com/office/drawing/2014/main" id="{383083E1-A36F-429D-BDB2-64633855A2A3}"/>
+                <a16:creationId xmlns:a16="http://schemas.microsoft.com/office/drawing/2014/main" id="{79CAD519-E4F1-444A-B325-5BB5A406BF3E}"/>
               </a:ext>
             </a:extLst>
           </p:cNvPr>
@@ -7893,7 +7893,7 @@
           <p:cNvPr id="4" name="">
             <a:extLst xmlns:a="http://schemas.openxmlformats.org/drawingml/2006/main">
               <a:ext uri="{FF2B5EF4-FFF2-40B4-BE49-F238E27FC236}">
-                <a16:creationId xmlns:a16="http://schemas.microsoft.com/office/drawing/2014/main" id="{5E6435F4-A4AF-4CED-8D91-BA39955F4046}"/>
+                <a16:creationId xmlns:a16="http://schemas.microsoft.com/office/drawing/2014/main" id="{ECC197F5-3152-4B4E-B5BC-8955B68743B5}"/>
               </a:ext>
             </a:extLst>
           </p:cNvPr>
@@ -7950,7 +7950,7 @@
           <p:cNvPr id="5" name="">
             <a:extLst xmlns:a="http://schemas.openxmlformats.org/drawingml/2006/main">
               <a:ext uri="{FF2B5EF4-FFF2-40B4-BE49-F238E27FC236}">
-                <a16:creationId xmlns:a16="http://schemas.microsoft.com/office/drawing/2014/main" id="{1A725AAF-EEEF-4E71-A78C-CCDCBF505B1F}"/>
+                <a16:creationId xmlns:a16="http://schemas.microsoft.com/office/drawing/2014/main" id="{B9B486DA-97F4-4C49-A972-C4F50F22677B}"/>
               </a:ext>
             </a:extLst>
           </p:cNvPr>
@@ -8007,7 +8007,7 @@
           <p:cNvPr id="6" name="">
             <a:extLst xmlns:a="http://schemas.openxmlformats.org/drawingml/2006/main">
               <a:ext uri="{FF2B5EF4-FFF2-40B4-BE49-F238E27FC236}">
-                <a16:creationId xmlns:a16="http://schemas.microsoft.com/office/drawing/2014/main" id="{6BD36665-C5DF-4562-985F-315AABD8C103}"/>
+                <a16:creationId xmlns:a16="http://schemas.microsoft.com/office/drawing/2014/main" id="{2721F148-0019-409B-AA52-74EEA4A7BF91}"/>
               </a:ext>
             </a:extLst>
           </p:cNvPr>
@@ -8064,7 +8064,7 @@
           <p:cNvPr id="7" name="">
             <a:extLst xmlns:a="http://schemas.openxmlformats.org/drawingml/2006/main">
               <a:ext uri="{FF2B5EF4-FFF2-40B4-BE49-F238E27FC236}">
-                <a16:creationId xmlns:a16="http://schemas.microsoft.com/office/drawing/2014/main" id="{4B801C6F-3907-4CAF-B5FC-F4743240B380}"/>
+                <a16:creationId xmlns:a16="http://schemas.microsoft.com/office/drawing/2014/main" id="{F89D970E-D0E4-4624-AF34-847A0F2773EC}"/>
               </a:ext>
             </a:extLst>
           </p:cNvPr>
@@ -8096,7 +8096,7 @@
           <p:cNvPr id="8" name="">
             <a:extLst xmlns:a="http://schemas.openxmlformats.org/drawingml/2006/main">
               <a:ext uri="{FF2B5EF4-FFF2-40B4-BE49-F238E27FC236}">
-                <a16:creationId xmlns:a16="http://schemas.microsoft.com/office/drawing/2014/main" id="{5E2823FB-2349-4A61-9BA2-1DBF4C7FBEC0}"/>
+                <a16:creationId xmlns:a16="http://schemas.microsoft.com/office/drawing/2014/main" id="{B3CF4CB8-B66B-49F5-84BC-559F3A6A1688}"/>
               </a:ext>
             </a:extLst>
           </p:cNvPr>
@@ -8153,7 +8153,7 @@
           <p:cNvPr id="9" name="">
             <a:extLst xmlns:a="http://schemas.openxmlformats.org/drawingml/2006/main">
               <a:ext uri="{FF2B5EF4-FFF2-40B4-BE49-F238E27FC236}">
-                <a16:creationId xmlns:a16="http://schemas.microsoft.com/office/drawing/2014/main" id="{F60A8CD8-C12D-43D8-AB4A-83004726B133}"/>
+                <a16:creationId xmlns:a16="http://schemas.microsoft.com/office/drawing/2014/main" id="{0D0A00AC-CB33-446F-A7BD-987AFDE55677}"/>
               </a:ext>
             </a:extLst>
           </p:cNvPr>
@@ -8210,19 +8210,19 @@
           <p:cNvPr id="10" name="">
             <a:extLst xmlns:a="http://schemas.openxmlformats.org/drawingml/2006/main">
               <a:ext uri="{FF2B5EF4-FFF2-40B4-BE49-F238E27FC236}">
-                <a16:creationId xmlns:a16="http://schemas.microsoft.com/office/drawing/2014/main" id="{FE93EBEA-72A2-4814-B395-1641547B9EE9}"/>
-              </a:ext>
-            </a:extLst>
-          </p:cNvPr>
-          <p:cNvSpPr>
-            <a:spLocks xmlns:a="http://schemas.openxmlformats.org/drawingml/2006/main" noGrp="1"/>
-          </p:cNvSpPr>
-          <p:nvPr/>
-        </p:nvSpPr>
-        <p:spPr>
-          <a:xfrm xmlns:a="http://schemas.openxmlformats.org/drawingml/2006/main">
-            <a:off x="914400" y="1257300"/>
-            <a:ext cx="10363200" cy="781050"/>
+                <a16:creationId xmlns:a16="http://schemas.microsoft.com/office/drawing/2014/main" id="{264FA510-039A-4213-908A-CD630BB9DA12}"/>
+              </a:ext>
+            </a:extLst>
+          </p:cNvPr>
+          <p:cNvSpPr>
+            <a:spLocks xmlns:a="http://schemas.openxmlformats.org/drawingml/2006/main" noGrp="1"/>
+          </p:cNvSpPr>
+          <p:nvPr/>
+        </p:nvSpPr>
+        <p:spPr>
+          <a:xfrm xmlns:a="http://schemas.openxmlformats.org/drawingml/2006/main">
+            <a:off x="857250" y="1219200"/>
+            <a:ext cx="10477500" cy="742950"/>
           </a:xfrm>
           <a:prstGeom xmlns:a="http://schemas.openxmlformats.org/drawingml/2006/main" prst="rect">
             <a:avLst/>
@@ -8239,7 +8239,7 @@
           <a:lstStyle xmlns:a="http://schemas.openxmlformats.org/drawingml/2006/main"/>
           <a:p xmlns:a="http://schemas.openxmlformats.org/drawingml/2006/main">
             <a:pPr algn="ctr">
-              <a:defRPr sz="2175" b="1">
+              <a:defRPr sz="2100" b="1">
                 <a:solidFill>
                   <a:srgbClr val="17253A"/>
                 </a:solidFill>
@@ -8249,7 +8249,7 @@
               </a:defRPr>
             </a:pPr>
             <a:r>
-              <a:rPr sz="2175" b="1">
+              <a:rPr sz="2100" b="1">
                 <a:solidFill>
                   <a:srgbClr val="17253A"/>
                 </a:solidFill>
@@ -8267,28 +8267,30 @@
           <p:cNvPr id="11" name="">
             <a:extLst xmlns:a="http://schemas.openxmlformats.org/drawingml/2006/main">
               <a:ext uri="{FF2B5EF4-FFF2-40B4-BE49-F238E27FC236}">
-                <a16:creationId xmlns:a16="http://schemas.microsoft.com/office/drawing/2014/main" id="{06C782F1-B0CE-43AF-B65E-065361AB58D5}"/>
-              </a:ext>
-            </a:extLst>
-          </p:cNvPr>
-          <p:cNvSpPr>
-            <a:spLocks xmlns:a="http://schemas.openxmlformats.org/drawingml/2006/main" noGrp="1"/>
-          </p:cNvSpPr>
-          <p:nvPr/>
-        </p:nvSpPr>
-        <p:spPr>
-          <a:xfrm xmlns:a="http://schemas.openxmlformats.org/drawingml/2006/main">
-            <a:off x="1000125" y="2247900"/>
-            <a:ext cx="476250" cy="476250"/>
-          </a:xfrm>
-          <a:prstGeom xmlns:a="http://schemas.openxmlformats.org/drawingml/2006/main" prst="ellipse">
+                <a16:creationId xmlns:a16="http://schemas.microsoft.com/office/drawing/2014/main" id="{2532ACB9-0A00-4D51-AB51-17F013E23E8A}"/>
+              </a:ext>
+            </a:extLst>
+          </p:cNvPr>
+          <p:cNvSpPr>
+            <a:spLocks xmlns:a="http://schemas.openxmlformats.org/drawingml/2006/main" noGrp="1"/>
+          </p:cNvSpPr>
+          <p:nvPr/>
+        </p:nvSpPr>
+        <p:spPr>
+          <a:xfrm xmlns:a="http://schemas.openxmlformats.org/drawingml/2006/main">
+            <a:off x="971550" y="2124075"/>
+            <a:ext cx="38100" cy="3524250"/>
+          </a:xfrm>
+          <a:prstGeom xmlns:a="http://schemas.openxmlformats.org/drawingml/2006/main" prst="rect">
             <a:avLst/>
           </a:prstGeom>
           <a:solidFill xmlns:a="http://schemas.openxmlformats.org/drawingml/2006/main">
-            <a:srgbClr val="18324A"/>
+            <a:srgbClr val="2C6E73"/>
           </a:solidFill>
           <a:ln xmlns:a="http://schemas.openxmlformats.org/drawingml/2006/main" w="0">
-            <a:noFill/>
+            <a:solidFill>
+              <a:srgbClr val="2C6E73"/>
+            </a:solidFill>
           </a:ln>
         </p:spPr>
       </p:sp>
@@ -8297,19 +8299,19 @@
           <p:cNvPr id="12" name="">
             <a:extLst xmlns:a="http://schemas.openxmlformats.org/drawingml/2006/main">
               <a:ext uri="{FF2B5EF4-FFF2-40B4-BE49-F238E27FC236}">
-                <a16:creationId xmlns:a16="http://schemas.microsoft.com/office/drawing/2014/main" id="{485BD9DD-00F5-4F18-9CD2-B00F1BD5A0EE}"/>
-              </a:ext>
-            </a:extLst>
-          </p:cNvPr>
-          <p:cNvSpPr>
-            <a:spLocks xmlns:a="http://schemas.openxmlformats.org/drawingml/2006/main" noGrp="1"/>
-          </p:cNvSpPr>
-          <p:nvPr/>
-        </p:nvSpPr>
-        <p:spPr>
-          <a:xfrm xmlns:a="http://schemas.openxmlformats.org/drawingml/2006/main">
-            <a:off x="1000125" y="2276475"/>
-            <a:ext cx="476250" cy="419100"/>
+                <a16:creationId xmlns:a16="http://schemas.microsoft.com/office/drawing/2014/main" id="{20889DDD-88F0-4EDB-B791-0D75A230BFDA}"/>
+              </a:ext>
+            </a:extLst>
+          </p:cNvPr>
+          <p:cNvSpPr>
+            <a:spLocks xmlns:a="http://schemas.openxmlformats.org/drawingml/2006/main" noGrp="1"/>
+          </p:cNvSpPr>
+          <p:nvPr/>
+        </p:nvSpPr>
+        <p:spPr>
+          <a:xfrm xmlns:a="http://schemas.openxmlformats.org/drawingml/2006/main">
+            <a:off x="1162050" y="2200275"/>
+            <a:ext cx="400050" cy="400050"/>
           </a:xfrm>
           <a:prstGeom xmlns:a="http://schemas.openxmlformats.org/drawingml/2006/main" prst="rect">
             <a:avLst/>
@@ -8326,9 +8328,9 @@
           <a:lstStyle xmlns:a="http://schemas.openxmlformats.org/drawingml/2006/main"/>
           <a:p xmlns:a="http://schemas.openxmlformats.org/drawingml/2006/main">
             <a:pPr algn="ctr">
-              <a:defRPr sz="1350" b="1">
-                <a:solidFill>
-                  <a:srgbClr val="FFFFFF"/>
+              <a:defRPr sz="1125" b="1">
+                <a:solidFill>
+                  <a:srgbClr val="2C6E73"/>
                 </a:solidFill>
                 <a:latin typeface="Arial"/>
                 <a:ea typeface="Arial"/>
@@ -8336,9 +8338,9 @@
               </a:defRPr>
             </a:pPr>
             <a:r>
-              <a:rPr sz="1350" b="1">
-                <a:solidFill>
-                  <a:srgbClr val="FFFFFF"/>
+              <a:rPr sz="1125" b="1">
+                <a:solidFill>
+                  <a:srgbClr val="2C6E73"/>
                 </a:solidFill>
                 <a:latin typeface="Arial"/>
                 <a:ea typeface="Arial"/>
@@ -8354,19 +8356,19 @@
           <p:cNvPr id="13" name="">
             <a:extLst xmlns:a="http://schemas.openxmlformats.org/drawingml/2006/main">
               <a:ext uri="{FF2B5EF4-FFF2-40B4-BE49-F238E27FC236}">
-                <a16:creationId xmlns:a16="http://schemas.microsoft.com/office/drawing/2014/main" id="{2B159C92-F4A9-42E7-B7AF-CE86017F075A}"/>
-              </a:ext>
-            </a:extLst>
-          </p:cNvPr>
-          <p:cNvSpPr>
-            <a:spLocks xmlns:a="http://schemas.openxmlformats.org/drawingml/2006/main" noGrp="1"/>
-          </p:cNvSpPr>
-          <p:nvPr/>
-        </p:nvSpPr>
-        <p:spPr>
-          <a:xfrm xmlns:a="http://schemas.openxmlformats.org/drawingml/2006/main">
-            <a:off x="1714500" y="2181225"/>
-            <a:ext cx="9429750" cy="609600"/>
+                <a16:creationId xmlns:a16="http://schemas.microsoft.com/office/drawing/2014/main" id="{EA589FE1-D3E4-4E64-907A-E039565F5A60}"/>
+              </a:ext>
+            </a:extLst>
+          </p:cNvPr>
+          <p:cNvSpPr>
+            <a:spLocks xmlns:a="http://schemas.openxmlformats.org/drawingml/2006/main" noGrp="1"/>
+          </p:cNvSpPr>
+          <p:nvPr/>
+        </p:nvSpPr>
+        <p:spPr>
+          <a:xfrm xmlns:a="http://schemas.openxmlformats.org/drawingml/2006/main">
+            <a:off x="1714500" y="2114550"/>
+            <a:ext cx="9525000" cy="809625"/>
           </a:xfrm>
           <a:prstGeom xmlns:a="http://schemas.openxmlformats.org/drawingml/2006/main" prst="rect">
             <a:avLst/>
@@ -8383,7 +8385,7 @@
           <a:lstStyle xmlns:a="http://schemas.openxmlformats.org/drawingml/2006/main"/>
           <a:p xmlns:a="http://schemas.openxmlformats.org/drawingml/2006/main">
             <a:pPr algn="l">
-              <a:defRPr sz="1500" b="0">
+              <a:defRPr sz="1725" b="0">
                 <a:solidFill>
                   <a:srgbClr val="17253A"/>
                 </a:solidFill>
@@ -8393,7 +8395,7 @@
               </a:defRPr>
             </a:pPr>
             <a:r>
-              <a:rPr sz="1500" b="0">
+              <a:rPr sz="1725" b="0">
                 <a:solidFill>
                   <a:srgbClr val="17253A"/>
                 </a:solidFill>
@@ -8401,7 +8403,7 @@
                 <a:ea typeface="Arial"/>
                 <a:cs typeface="Arial"/>
               </a:rPr>
-              <a:t>Identify the structure: Mark known properties and angle facts on the diagram.</a:t>
+              <a:t>Angles in a triangle total 180°</a:t>
             </a:r>
           </a:p>
         </p:txBody>
@@ -8411,28 +8413,30 @@
           <p:cNvPr id="14" name="">
             <a:extLst xmlns:a="http://schemas.openxmlformats.org/drawingml/2006/main">
               <a:ext uri="{FF2B5EF4-FFF2-40B4-BE49-F238E27FC236}">
-                <a16:creationId xmlns:a16="http://schemas.microsoft.com/office/drawing/2014/main" id="{0BB53A78-5429-4518-B211-24A3ED0C2610}"/>
-              </a:ext>
-            </a:extLst>
-          </p:cNvPr>
-          <p:cNvSpPr>
-            <a:spLocks xmlns:a="http://schemas.openxmlformats.org/drawingml/2006/main" noGrp="1"/>
-          </p:cNvSpPr>
-          <p:nvPr/>
-        </p:nvSpPr>
-        <p:spPr>
-          <a:xfrm xmlns:a="http://schemas.openxmlformats.org/drawingml/2006/main">
-            <a:off x="1000125" y="2990850"/>
-            <a:ext cx="476250" cy="476250"/>
-          </a:xfrm>
-          <a:prstGeom xmlns:a="http://schemas.openxmlformats.org/drawingml/2006/main" prst="ellipse">
+                <a16:creationId xmlns:a16="http://schemas.microsoft.com/office/drawing/2014/main" id="{AC18FA9E-06F1-4042-B8AF-2695B8F2255B}"/>
+              </a:ext>
+            </a:extLst>
+          </p:cNvPr>
+          <p:cNvSpPr>
+            <a:spLocks xmlns:a="http://schemas.openxmlformats.org/drawingml/2006/main" noGrp="1"/>
+          </p:cNvSpPr>
+          <p:nvPr/>
+        </p:nvSpPr>
+        <p:spPr>
+          <a:xfrm xmlns:a="http://schemas.openxmlformats.org/drawingml/2006/main">
+            <a:off x="1714500" y="2943225"/>
+            <a:ext cx="9334500" cy="9525"/>
+          </a:xfrm>
+          <a:prstGeom xmlns:a="http://schemas.openxmlformats.org/drawingml/2006/main" prst="rect">
             <a:avLst/>
           </a:prstGeom>
           <a:solidFill xmlns:a="http://schemas.openxmlformats.org/drawingml/2006/main">
-            <a:srgbClr val="2C6E73"/>
+            <a:srgbClr val="D9E0E6"/>
           </a:solidFill>
           <a:ln xmlns:a="http://schemas.openxmlformats.org/drawingml/2006/main" w="0">
-            <a:noFill/>
+            <a:solidFill>
+              <a:srgbClr val="D9E0E6"/>
+            </a:solidFill>
           </a:ln>
         </p:spPr>
       </p:sp>
@@ -8441,19 +8445,19 @@
           <p:cNvPr id="15" name="">
             <a:extLst xmlns:a="http://schemas.openxmlformats.org/drawingml/2006/main">
               <a:ext uri="{FF2B5EF4-FFF2-40B4-BE49-F238E27FC236}">
-                <a16:creationId xmlns:a16="http://schemas.microsoft.com/office/drawing/2014/main" id="{A57F3EEE-60F4-4061-8B2C-395067E1C26F}"/>
-              </a:ext>
-            </a:extLst>
-          </p:cNvPr>
-          <p:cNvSpPr>
-            <a:spLocks xmlns:a="http://schemas.openxmlformats.org/drawingml/2006/main" noGrp="1"/>
-          </p:cNvSpPr>
-          <p:nvPr/>
-        </p:nvSpPr>
-        <p:spPr>
-          <a:xfrm xmlns:a="http://schemas.openxmlformats.org/drawingml/2006/main">
-            <a:off x="1000125" y="3019425"/>
-            <a:ext cx="476250" cy="419100"/>
+                <a16:creationId xmlns:a16="http://schemas.microsoft.com/office/drawing/2014/main" id="{CC383EFC-4201-4478-8909-D076D140FF29}"/>
+              </a:ext>
+            </a:extLst>
+          </p:cNvPr>
+          <p:cNvSpPr>
+            <a:spLocks xmlns:a="http://schemas.openxmlformats.org/drawingml/2006/main" noGrp="1"/>
+          </p:cNvSpPr>
+          <p:nvPr/>
+        </p:nvSpPr>
+        <p:spPr>
+          <a:xfrm xmlns:a="http://schemas.openxmlformats.org/drawingml/2006/main">
+            <a:off x="1162050" y="3076575"/>
+            <a:ext cx="400050" cy="400050"/>
           </a:xfrm>
           <a:prstGeom xmlns:a="http://schemas.openxmlformats.org/drawingml/2006/main" prst="rect">
             <a:avLst/>
@@ -8470,9 +8474,9 @@
           <a:lstStyle xmlns:a="http://schemas.openxmlformats.org/drawingml/2006/main"/>
           <a:p xmlns:a="http://schemas.openxmlformats.org/drawingml/2006/main">
             <a:pPr algn="ctr">
-              <a:defRPr sz="1350" b="1">
-                <a:solidFill>
-                  <a:srgbClr val="FFFFFF"/>
+              <a:defRPr sz="1125" b="1">
+                <a:solidFill>
+                  <a:srgbClr val="2C6E73"/>
                 </a:solidFill>
                 <a:latin typeface="Arial"/>
                 <a:ea typeface="Arial"/>
@@ -8480,9 +8484,9 @@
               </a:defRPr>
             </a:pPr>
             <a:r>
-              <a:rPr sz="1350" b="1">
-                <a:solidFill>
-                  <a:srgbClr val="FFFFFF"/>
+              <a:rPr sz="1125" b="1">
+                <a:solidFill>
+                  <a:srgbClr val="2C6E73"/>
                 </a:solidFill>
                 <a:latin typeface="Arial"/>
                 <a:ea typeface="Arial"/>
@@ -8498,19 +8502,19 @@
           <p:cNvPr id="16" name="">
             <a:extLst xmlns:a="http://schemas.openxmlformats.org/drawingml/2006/main">
               <a:ext uri="{FF2B5EF4-FFF2-40B4-BE49-F238E27FC236}">
-                <a16:creationId xmlns:a16="http://schemas.microsoft.com/office/drawing/2014/main" id="{4BD972EA-E24E-4901-96E9-4B4639162917}"/>
-              </a:ext>
-            </a:extLst>
-          </p:cNvPr>
-          <p:cNvSpPr>
-            <a:spLocks xmlns:a="http://schemas.openxmlformats.org/drawingml/2006/main" noGrp="1"/>
-          </p:cNvSpPr>
-          <p:nvPr/>
-        </p:nvSpPr>
-        <p:spPr>
-          <a:xfrm xmlns:a="http://schemas.openxmlformats.org/drawingml/2006/main">
-            <a:off x="1714500" y="2924175"/>
-            <a:ext cx="9429750" cy="609600"/>
+                <a16:creationId xmlns:a16="http://schemas.microsoft.com/office/drawing/2014/main" id="{435CD10C-8F6D-42BF-A7E3-D0F3AAB97F45}"/>
+              </a:ext>
+            </a:extLst>
+          </p:cNvPr>
+          <p:cNvSpPr>
+            <a:spLocks xmlns:a="http://schemas.openxmlformats.org/drawingml/2006/main" noGrp="1"/>
+          </p:cNvSpPr>
+          <p:nvPr/>
+        </p:nvSpPr>
+        <p:spPr>
+          <a:xfrm xmlns:a="http://schemas.openxmlformats.org/drawingml/2006/main">
+            <a:off x="1714500" y="2990850"/>
+            <a:ext cx="9525000" cy="809625"/>
           </a:xfrm>
           <a:prstGeom xmlns:a="http://schemas.openxmlformats.org/drawingml/2006/main" prst="rect">
             <a:avLst/>
@@ -8527,7 +8531,7 @@
           <a:lstStyle xmlns:a="http://schemas.openxmlformats.org/drawingml/2006/main"/>
           <a:p xmlns:a="http://schemas.openxmlformats.org/drawingml/2006/main">
             <a:pPr algn="l">
-              <a:defRPr sz="1500" b="0">
+              <a:defRPr sz="1725" b="0">
                 <a:solidFill>
                   <a:srgbClr val="17253A"/>
                 </a:solidFill>
@@ -8537,7 +8541,7 @@
               </a:defRPr>
             </a:pPr>
             <a:r>
-              <a:rPr sz="1500" b="0">
+              <a:rPr sz="1725" b="0">
                 <a:solidFill>
                   <a:srgbClr val="17253A"/>
                 </a:solidFill>
@@ -8545,7 +8549,7 @@
                 <a:ea typeface="Arial"/>
                 <a:cs typeface="Arial"/>
               </a:rPr>
-              <a:t>Set up the method: Form a calculation using angles on a line, around a point or inside a shape.</a:t>
+              <a:t>47° + 68° = 115°</a:t>
             </a:r>
           </a:p>
         </p:txBody>
@@ -8555,28 +8559,30 @@
           <p:cNvPr id="17" name="">
             <a:extLst xmlns:a="http://schemas.openxmlformats.org/drawingml/2006/main">
               <a:ext uri="{FF2B5EF4-FFF2-40B4-BE49-F238E27FC236}">
-                <a16:creationId xmlns:a16="http://schemas.microsoft.com/office/drawing/2014/main" id="{E5679C80-D167-4C82-B8DC-C0A33C3666C4}"/>
-              </a:ext>
-            </a:extLst>
-          </p:cNvPr>
-          <p:cNvSpPr>
-            <a:spLocks xmlns:a="http://schemas.openxmlformats.org/drawingml/2006/main" noGrp="1"/>
-          </p:cNvSpPr>
-          <p:nvPr/>
-        </p:nvSpPr>
-        <p:spPr>
-          <a:xfrm xmlns:a="http://schemas.openxmlformats.org/drawingml/2006/main">
-            <a:off x="1000125" y="3733800"/>
-            <a:ext cx="476250" cy="476250"/>
-          </a:xfrm>
-          <a:prstGeom xmlns:a="http://schemas.openxmlformats.org/drawingml/2006/main" prst="ellipse">
+                <a16:creationId xmlns:a16="http://schemas.microsoft.com/office/drawing/2014/main" id="{E461B8DA-28B3-4F26-9117-687CCF1FCFC2}"/>
+              </a:ext>
+            </a:extLst>
+          </p:cNvPr>
+          <p:cNvSpPr>
+            <a:spLocks xmlns:a="http://schemas.openxmlformats.org/drawingml/2006/main" noGrp="1"/>
+          </p:cNvSpPr>
+          <p:nvPr/>
+        </p:nvSpPr>
+        <p:spPr>
+          <a:xfrm xmlns:a="http://schemas.openxmlformats.org/drawingml/2006/main">
+            <a:off x="1714500" y="3819525"/>
+            <a:ext cx="9334500" cy="9525"/>
+          </a:xfrm>
+          <a:prstGeom xmlns:a="http://schemas.openxmlformats.org/drawingml/2006/main" prst="rect">
             <a:avLst/>
           </a:prstGeom>
           <a:solidFill xmlns:a="http://schemas.openxmlformats.org/drawingml/2006/main">
-            <a:srgbClr val="2C6E73"/>
+            <a:srgbClr val="D9E0E6"/>
           </a:solidFill>
           <a:ln xmlns:a="http://schemas.openxmlformats.org/drawingml/2006/main" w="0">
-            <a:noFill/>
+            <a:solidFill>
+              <a:srgbClr val="D9E0E6"/>
+            </a:solidFill>
           </a:ln>
         </p:spPr>
       </p:sp>
@@ -8585,19 +8591,19 @@
           <p:cNvPr id="18" name="">
             <a:extLst xmlns:a="http://schemas.openxmlformats.org/drawingml/2006/main">
               <a:ext uri="{FF2B5EF4-FFF2-40B4-BE49-F238E27FC236}">
-                <a16:creationId xmlns:a16="http://schemas.microsoft.com/office/drawing/2014/main" id="{D5923176-3D98-45EB-B296-4FB168D1E83A}"/>
-              </a:ext>
-            </a:extLst>
-          </p:cNvPr>
-          <p:cNvSpPr>
-            <a:spLocks xmlns:a="http://schemas.openxmlformats.org/drawingml/2006/main" noGrp="1"/>
-          </p:cNvSpPr>
-          <p:nvPr/>
-        </p:nvSpPr>
-        <p:spPr>
-          <a:xfrm xmlns:a="http://schemas.openxmlformats.org/drawingml/2006/main">
-            <a:off x="1000125" y="3762375"/>
-            <a:ext cx="476250" cy="419100"/>
+                <a16:creationId xmlns:a16="http://schemas.microsoft.com/office/drawing/2014/main" id="{C474223E-8AB2-4741-B713-DC9FC73A82E5}"/>
+              </a:ext>
+            </a:extLst>
+          </p:cNvPr>
+          <p:cNvSpPr>
+            <a:spLocks xmlns:a="http://schemas.openxmlformats.org/drawingml/2006/main" noGrp="1"/>
+          </p:cNvSpPr>
+          <p:nvPr/>
+        </p:nvSpPr>
+        <p:spPr>
+          <a:xfrm xmlns:a="http://schemas.openxmlformats.org/drawingml/2006/main">
+            <a:off x="1162050" y="3952875"/>
+            <a:ext cx="400050" cy="400050"/>
           </a:xfrm>
           <a:prstGeom xmlns:a="http://schemas.openxmlformats.org/drawingml/2006/main" prst="rect">
             <a:avLst/>
@@ -8614,9 +8620,9 @@
           <a:lstStyle xmlns:a="http://schemas.openxmlformats.org/drawingml/2006/main"/>
           <a:p xmlns:a="http://schemas.openxmlformats.org/drawingml/2006/main">
             <a:pPr algn="ctr">
-              <a:defRPr sz="1350" b="1">
-                <a:solidFill>
-                  <a:srgbClr val="FFFFFF"/>
+              <a:defRPr sz="1125" b="1">
+                <a:solidFill>
+                  <a:srgbClr val="2C6E73"/>
                 </a:solidFill>
                 <a:latin typeface="Arial"/>
                 <a:ea typeface="Arial"/>
@@ -8624,9 +8630,9 @@
               </a:defRPr>
             </a:pPr>
             <a:r>
-              <a:rPr sz="1350" b="1">
-                <a:solidFill>
-                  <a:srgbClr val="FFFFFF"/>
+              <a:rPr sz="1125" b="1">
+                <a:solidFill>
+                  <a:srgbClr val="2C6E73"/>
                 </a:solidFill>
                 <a:latin typeface="Arial"/>
                 <a:ea typeface="Arial"/>
@@ -8642,19 +8648,19 @@
           <p:cNvPr id="19" name="">
             <a:extLst xmlns:a="http://schemas.openxmlformats.org/drawingml/2006/main">
               <a:ext uri="{FF2B5EF4-FFF2-40B4-BE49-F238E27FC236}">
-                <a16:creationId xmlns:a16="http://schemas.microsoft.com/office/drawing/2014/main" id="{35CC94E6-5B39-40DF-89FC-F6CF0EA27344}"/>
-              </a:ext>
-            </a:extLst>
-          </p:cNvPr>
-          <p:cNvSpPr>
-            <a:spLocks xmlns:a="http://schemas.openxmlformats.org/drawingml/2006/main" noGrp="1"/>
-          </p:cNvSpPr>
-          <p:nvPr/>
-        </p:nvSpPr>
-        <p:spPr>
-          <a:xfrm xmlns:a="http://schemas.openxmlformats.org/drawingml/2006/main">
-            <a:off x="1714500" y="3667125"/>
-            <a:ext cx="9429750" cy="609600"/>
+                <a16:creationId xmlns:a16="http://schemas.microsoft.com/office/drawing/2014/main" id="{2508FE6B-A091-4EA9-9662-C8080E917096}"/>
+              </a:ext>
+            </a:extLst>
+          </p:cNvPr>
+          <p:cNvSpPr>
+            <a:spLocks xmlns:a="http://schemas.openxmlformats.org/drawingml/2006/main" noGrp="1"/>
+          </p:cNvSpPr>
+          <p:nvPr/>
+        </p:nvSpPr>
+        <p:spPr>
+          <a:xfrm xmlns:a="http://schemas.openxmlformats.org/drawingml/2006/main">
+            <a:off x="1714500" y="3867150"/>
+            <a:ext cx="9525000" cy="809625"/>
           </a:xfrm>
           <a:prstGeom xmlns:a="http://schemas.openxmlformats.org/drawingml/2006/main" prst="rect">
             <a:avLst/>
@@ -8671,7 +8677,7 @@
           <a:lstStyle xmlns:a="http://schemas.openxmlformats.org/drawingml/2006/main"/>
           <a:p xmlns:a="http://schemas.openxmlformats.org/drawingml/2006/main">
             <a:pPr algn="l">
-              <a:defRPr sz="1500" b="0">
+              <a:defRPr sz="1725" b="0">
                 <a:solidFill>
                   <a:srgbClr val="17253A"/>
                 </a:solidFill>
@@ -8681,7 +8687,7 @@
               </a:defRPr>
             </a:pPr>
             <a:r>
-              <a:rPr sz="1500" b="0">
+              <a:rPr sz="1725" b="0">
                 <a:solidFill>
                   <a:srgbClr val="17253A"/>
                 </a:solidFill>
@@ -8689,7 +8695,7 @@
                 <a:ea typeface="Arial"/>
                 <a:cs typeface="Arial"/>
               </a:rPr>
-              <a:t>Complete the calculation: 65 degrees.</a:t>
+              <a:t>Third angle = 180° - 115°</a:t>
             </a:r>
           </a:p>
         </p:txBody>
@@ -8699,28 +8705,30 @@
           <p:cNvPr id="20" name="">
             <a:extLst xmlns:a="http://schemas.openxmlformats.org/drawingml/2006/main">
               <a:ext uri="{FF2B5EF4-FFF2-40B4-BE49-F238E27FC236}">
-                <a16:creationId xmlns:a16="http://schemas.microsoft.com/office/drawing/2014/main" id="{FFE2AB4B-58C3-40BC-AE40-FD1EF1126F25}"/>
-              </a:ext>
-            </a:extLst>
-          </p:cNvPr>
-          <p:cNvSpPr>
-            <a:spLocks xmlns:a="http://schemas.openxmlformats.org/drawingml/2006/main" noGrp="1"/>
-          </p:cNvSpPr>
-          <p:nvPr/>
-        </p:nvSpPr>
-        <p:spPr>
-          <a:xfrm xmlns:a="http://schemas.openxmlformats.org/drawingml/2006/main">
-            <a:off x="1000125" y="4476750"/>
-            <a:ext cx="476250" cy="476250"/>
-          </a:xfrm>
-          <a:prstGeom xmlns:a="http://schemas.openxmlformats.org/drawingml/2006/main" prst="ellipse">
+                <a16:creationId xmlns:a16="http://schemas.microsoft.com/office/drawing/2014/main" id="{446E3389-2838-4EE1-B2C1-B5EEA0297D84}"/>
+              </a:ext>
+            </a:extLst>
+          </p:cNvPr>
+          <p:cNvSpPr>
+            <a:spLocks xmlns:a="http://schemas.openxmlformats.org/drawingml/2006/main" noGrp="1"/>
+          </p:cNvSpPr>
+          <p:nvPr/>
+        </p:nvSpPr>
+        <p:spPr>
+          <a:xfrm xmlns:a="http://schemas.openxmlformats.org/drawingml/2006/main">
+            <a:off x="1714500" y="4695825"/>
+            <a:ext cx="9334500" cy="9525"/>
+          </a:xfrm>
+          <a:prstGeom xmlns:a="http://schemas.openxmlformats.org/drawingml/2006/main" prst="rect">
             <a:avLst/>
           </a:prstGeom>
           <a:solidFill xmlns:a="http://schemas.openxmlformats.org/drawingml/2006/main">
-            <a:srgbClr val="2C6E73"/>
+            <a:srgbClr val="D9E0E6"/>
           </a:solidFill>
           <a:ln xmlns:a="http://schemas.openxmlformats.org/drawingml/2006/main" w="0">
-            <a:noFill/>
+            <a:solidFill>
+              <a:srgbClr val="D9E0E6"/>
+            </a:solidFill>
           </a:ln>
         </p:spPr>
       </p:sp>
@@ -8729,19 +8737,19 @@
           <p:cNvPr id="21" name="">
             <a:extLst xmlns:a="http://schemas.openxmlformats.org/drawingml/2006/main">
               <a:ext uri="{FF2B5EF4-FFF2-40B4-BE49-F238E27FC236}">
-                <a16:creationId xmlns:a16="http://schemas.microsoft.com/office/drawing/2014/main" id="{7550A381-48C1-4F42-895A-B7AD9153842A}"/>
-              </a:ext>
-            </a:extLst>
-          </p:cNvPr>
-          <p:cNvSpPr>
-            <a:spLocks xmlns:a="http://schemas.openxmlformats.org/drawingml/2006/main" noGrp="1"/>
-          </p:cNvSpPr>
-          <p:nvPr/>
-        </p:nvSpPr>
-        <p:spPr>
-          <a:xfrm xmlns:a="http://schemas.openxmlformats.org/drawingml/2006/main">
-            <a:off x="1000125" y="4505325"/>
-            <a:ext cx="476250" cy="419100"/>
+                <a16:creationId xmlns:a16="http://schemas.microsoft.com/office/drawing/2014/main" id="{123FCA2B-491E-43AB-A8EA-5D348DEA5D00}"/>
+              </a:ext>
+            </a:extLst>
+          </p:cNvPr>
+          <p:cNvSpPr>
+            <a:spLocks xmlns:a="http://schemas.openxmlformats.org/drawingml/2006/main" noGrp="1"/>
+          </p:cNvSpPr>
+          <p:nvPr/>
+        </p:nvSpPr>
+        <p:spPr>
+          <a:xfrm xmlns:a="http://schemas.openxmlformats.org/drawingml/2006/main">
+            <a:off x="1162050" y="4829175"/>
+            <a:ext cx="400050" cy="400050"/>
           </a:xfrm>
           <a:prstGeom xmlns:a="http://schemas.openxmlformats.org/drawingml/2006/main" prst="rect">
             <a:avLst/>
@@ -8758,9 +8766,9 @@
           <a:lstStyle xmlns:a="http://schemas.openxmlformats.org/drawingml/2006/main"/>
           <a:p xmlns:a="http://schemas.openxmlformats.org/drawingml/2006/main">
             <a:pPr algn="ctr">
-              <a:defRPr sz="1350" b="1">
-                <a:solidFill>
-                  <a:srgbClr val="FFFFFF"/>
+              <a:defRPr sz="1125" b="1">
+                <a:solidFill>
+                  <a:srgbClr val="2F785D"/>
                 </a:solidFill>
                 <a:latin typeface="Arial"/>
                 <a:ea typeface="Arial"/>
@@ -8768,9 +8776,9 @@
               </a:defRPr>
             </a:pPr>
             <a:r>
-              <a:rPr sz="1350" b="1">
-                <a:solidFill>
-                  <a:srgbClr val="FFFFFF"/>
+              <a:rPr sz="1125" b="1">
+                <a:solidFill>
+                  <a:srgbClr val="2F785D"/>
                 </a:solidFill>
                 <a:latin typeface="Arial"/>
                 <a:ea typeface="Arial"/>
@@ -8786,19 +8794,19 @@
           <p:cNvPr id="22" name="">
             <a:extLst xmlns:a="http://schemas.openxmlformats.org/drawingml/2006/main">
               <a:ext uri="{FF2B5EF4-FFF2-40B4-BE49-F238E27FC236}">
-                <a16:creationId xmlns:a16="http://schemas.microsoft.com/office/drawing/2014/main" id="{CA6377A0-0EE2-4529-9BD6-25D3D60EC182}"/>
-              </a:ext>
-            </a:extLst>
-          </p:cNvPr>
-          <p:cNvSpPr>
-            <a:spLocks xmlns:a="http://schemas.openxmlformats.org/drawingml/2006/main" noGrp="1"/>
-          </p:cNvSpPr>
-          <p:nvPr/>
-        </p:nvSpPr>
-        <p:spPr>
-          <a:xfrm xmlns:a="http://schemas.openxmlformats.org/drawingml/2006/main">
-            <a:off x="1714500" y="4410075"/>
-            <a:ext cx="9429750" cy="609600"/>
+                <a16:creationId xmlns:a16="http://schemas.microsoft.com/office/drawing/2014/main" id="{B69054BA-ED7D-41AC-A346-E0D624F7DD2E}"/>
+              </a:ext>
+            </a:extLst>
+          </p:cNvPr>
+          <p:cNvSpPr>
+            <a:spLocks xmlns:a="http://schemas.openxmlformats.org/drawingml/2006/main" noGrp="1"/>
+          </p:cNvSpPr>
+          <p:nvPr/>
+        </p:nvSpPr>
+        <p:spPr>
+          <a:xfrm xmlns:a="http://schemas.openxmlformats.org/drawingml/2006/main">
+            <a:off x="1714500" y="4743450"/>
+            <a:ext cx="9525000" cy="809625"/>
           </a:xfrm>
           <a:prstGeom xmlns:a="http://schemas.openxmlformats.org/drawingml/2006/main" prst="rect">
             <a:avLst/>
@@ -8815,7 +8823,7 @@
           <a:lstStyle xmlns:a="http://schemas.openxmlformats.org/drawingml/2006/main"/>
           <a:p xmlns:a="http://schemas.openxmlformats.org/drawingml/2006/main">
             <a:pPr algn="l">
-              <a:defRPr sz="1500" b="1">
+              <a:defRPr sz="1725" b="1">
                 <a:solidFill>
                   <a:srgbClr val="2F785D"/>
                 </a:solidFill>
@@ -8825,7 +8833,7 @@
               </a:defRPr>
             </a:pPr>
             <a:r>
-              <a:rPr sz="1500" b="1">
+              <a:rPr sz="1725" b="1">
                 <a:solidFill>
                   <a:srgbClr val="2F785D"/>
                 </a:solidFill>
@@ -8833,7 +8841,7 @@
                 <a:ea typeface="Arial"/>
                 <a:cs typeface="Arial"/>
               </a:rPr>
-              <a:t>Check the result: Check the angle size and label it with degrees.</a:t>
+              <a:t>65°</a:t>
             </a:r>
           </a:p>
         </p:txBody>
@@ -8841,7 +8849,7 @@
     </p:spTree>
     <p:extLst>
       <p:ext uri="{BB962C8B-B14F-4D97-AF65-F5344CB8AC3E}">
-        <p14:creationId xmlns:p14="http://schemas.microsoft.com/office/powerpoint/2010/main" val="1280326360"/>
+        <p14:creationId xmlns:p14="http://schemas.microsoft.com/office/powerpoint/2010/main" val="1903820734"/>
       </p:ext>
     </p:extLst>
   </p:cSld>
@@ -9134,7 +9142,7 @@
           <p:cNvPr id="15" name="">
             <a:extLst xmlns:a="http://schemas.openxmlformats.org/drawingml/2006/main">
               <a:ext uri="{FF2B5EF4-FFF2-40B4-BE49-F238E27FC236}">
-                <a16:creationId xmlns:a16="http://schemas.microsoft.com/office/drawing/2014/main" id="{8DDEED3E-156B-47A3-8213-D91AB59FB3F2}"/>
+                <a16:creationId xmlns:a16="http://schemas.microsoft.com/office/drawing/2014/main" id="{AF2AB741-35BF-4B37-9938-EF58F75B2E23}"/>
               </a:ext>
             </a:extLst>
           </p:cNvPr>
@@ -9166,7 +9174,7 @@
           <p:cNvPr id="2" name="">
             <a:extLst xmlns:a="http://schemas.openxmlformats.org/drawingml/2006/main">
               <a:ext uri="{FF2B5EF4-FFF2-40B4-BE49-F238E27FC236}">
-                <a16:creationId xmlns:a16="http://schemas.microsoft.com/office/drawing/2014/main" id="{C3F12A9E-7B8B-4207-A298-509DBFE44F61}"/>
+                <a16:creationId xmlns:a16="http://schemas.microsoft.com/office/drawing/2014/main" id="{5CF968F4-C590-44BC-B480-26B89F520E79}"/>
               </a:ext>
             </a:extLst>
           </p:cNvPr>
@@ -9223,7 +9231,7 @@
           <p:cNvPr id="3" name="">
             <a:extLst xmlns:a="http://schemas.openxmlformats.org/drawingml/2006/main">
               <a:ext uri="{FF2B5EF4-FFF2-40B4-BE49-F238E27FC236}">
-                <a16:creationId xmlns:a16="http://schemas.microsoft.com/office/drawing/2014/main" id="{7A149E9E-54FF-42D1-8EF6-B9B4027F4DEF}"/>
+                <a16:creationId xmlns:a16="http://schemas.microsoft.com/office/drawing/2014/main" id="{3917268A-1377-4765-BE31-515C946D4367}"/>
               </a:ext>
             </a:extLst>
           </p:cNvPr>
@@ -9255,7 +9263,7 @@
           <p:cNvPr id="4" name="">
             <a:extLst xmlns:a="http://schemas.openxmlformats.org/drawingml/2006/main">
               <a:ext uri="{FF2B5EF4-FFF2-40B4-BE49-F238E27FC236}">
-                <a16:creationId xmlns:a16="http://schemas.microsoft.com/office/drawing/2014/main" id="{E35C80E0-A75E-4F0E-94BC-0B8BFA281897}"/>
+                <a16:creationId xmlns:a16="http://schemas.microsoft.com/office/drawing/2014/main" id="{7A556D4F-3EA6-4E91-9F8B-867BA26C63B8}"/>
               </a:ext>
             </a:extLst>
           </p:cNvPr>
@@ -9312,7 +9320,7 @@
           <p:cNvPr id="5" name="">
             <a:extLst xmlns:a="http://schemas.openxmlformats.org/drawingml/2006/main">
               <a:ext uri="{FF2B5EF4-FFF2-40B4-BE49-F238E27FC236}">
-                <a16:creationId xmlns:a16="http://schemas.microsoft.com/office/drawing/2014/main" id="{6258D6A6-AAC1-4BDE-AC8A-53870866581E}"/>
+                <a16:creationId xmlns:a16="http://schemas.microsoft.com/office/drawing/2014/main" id="{750C24B1-ACC0-4F49-A9DD-F2F5A29F3F63}"/>
               </a:ext>
             </a:extLst>
           </p:cNvPr>
@@ -9369,7 +9377,7 @@
           <p:cNvPr id="6" name="">
             <a:extLst xmlns:a="http://schemas.openxmlformats.org/drawingml/2006/main">
               <a:ext uri="{FF2B5EF4-FFF2-40B4-BE49-F238E27FC236}">
-                <a16:creationId xmlns:a16="http://schemas.microsoft.com/office/drawing/2014/main" id="{2FD41E2F-9BEB-45C6-B457-6F59024F19EB}"/>
+                <a16:creationId xmlns:a16="http://schemas.microsoft.com/office/drawing/2014/main" id="{8240DCB3-72B7-4837-81A8-B86C818C1A91}"/>
               </a:ext>
             </a:extLst>
           </p:cNvPr>
@@ -9426,7 +9434,7 @@
           <p:cNvPr id="7" name="">
             <a:extLst xmlns:a="http://schemas.openxmlformats.org/drawingml/2006/main">
               <a:ext uri="{FF2B5EF4-FFF2-40B4-BE49-F238E27FC236}">
-                <a16:creationId xmlns:a16="http://schemas.microsoft.com/office/drawing/2014/main" id="{E1E8BF84-3048-4359-B1B2-38B347E5DD40}"/>
+                <a16:creationId xmlns:a16="http://schemas.microsoft.com/office/drawing/2014/main" id="{AB7C7932-1AE8-404B-B2D1-39AB4248D1EE}"/>
               </a:ext>
             </a:extLst>
           </p:cNvPr>
@@ -9458,7 +9466,7 @@
           <p:cNvPr id="8" name="">
             <a:extLst xmlns:a="http://schemas.openxmlformats.org/drawingml/2006/main">
               <a:ext uri="{FF2B5EF4-FFF2-40B4-BE49-F238E27FC236}">
-                <a16:creationId xmlns:a16="http://schemas.microsoft.com/office/drawing/2014/main" id="{EE43A0FE-3E78-49FB-A67F-4F4641E06B04}"/>
+                <a16:creationId xmlns:a16="http://schemas.microsoft.com/office/drawing/2014/main" id="{09926D61-0D26-438C-B44D-A6E9D194C851}"/>
               </a:ext>
             </a:extLst>
           </p:cNvPr>
@@ -9515,7 +9523,7 @@
           <p:cNvPr id="9" name="">
             <a:extLst xmlns:a="http://schemas.openxmlformats.org/drawingml/2006/main">
               <a:ext uri="{FF2B5EF4-FFF2-40B4-BE49-F238E27FC236}">
-                <a16:creationId xmlns:a16="http://schemas.microsoft.com/office/drawing/2014/main" id="{D8D910DA-29CF-4039-A5D3-7199EDBEB2B5}"/>
+                <a16:creationId xmlns:a16="http://schemas.microsoft.com/office/drawing/2014/main" id="{95B4BA60-53F3-4944-9BB6-65F1414E00FB}"/>
               </a:ext>
             </a:extLst>
           </p:cNvPr>
@@ -9572,7 +9580,7 @@
           <p:cNvPr id="10" name="">
             <a:extLst xmlns:a="http://schemas.openxmlformats.org/drawingml/2006/main">
               <a:ext uri="{FF2B5EF4-FFF2-40B4-BE49-F238E27FC236}">
-                <a16:creationId xmlns:a16="http://schemas.microsoft.com/office/drawing/2014/main" id="{6DD3285B-9B5B-49BE-A6B7-2791D6769C78}"/>
+                <a16:creationId xmlns:a16="http://schemas.microsoft.com/office/drawing/2014/main" id="{28368C3A-B659-4AD0-9284-C9D7CBF14485}"/>
               </a:ext>
             </a:extLst>
           </p:cNvPr>
@@ -9629,7 +9637,7 @@
           <p:cNvPr id="11" name="">
             <a:extLst xmlns:a="http://schemas.openxmlformats.org/drawingml/2006/main">
               <a:ext uri="{FF2B5EF4-FFF2-40B4-BE49-F238E27FC236}">
-                <a16:creationId xmlns:a16="http://schemas.microsoft.com/office/drawing/2014/main" id="{685182F7-A457-4042-8A5F-F4A81B86203E}"/>
+                <a16:creationId xmlns:a16="http://schemas.microsoft.com/office/drawing/2014/main" id="{DE2F083E-C573-47F2-9484-D5C500DA8852}"/>
               </a:ext>
             </a:extLst>
           </p:cNvPr>
@@ -9686,7 +9694,7 @@
           <p:cNvPr id="12" name="">
             <a:extLst xmlns:a="http://schemas.openxmlformats.org/drawingml/2006/main">
               <a:ext uri="{FF2B5EF4-FFF2-40B4-BE49-F238E27FC236}">
-                <a16:creationId xmlns:a16="http://schemas.microsoft.com/office/drawing/2014/main" id="{525D49C9-5761-46DF-8156-3C1345190908}"/>
+                <a16:creationId xmlns:a16="http://schemas.microsoft.com/office/drawing/2014/main" id="{77D2CC4F-5C40-49F6-9B49-2F4E2DAD5903}"/>
               </a:ext>
             </a:extLst>
           </p:cNvPr>
@@ -9718,7 +9726,7 @@
           <p:cNvPr id="13" name="">
             <a:extLst xmlns:a="http://schemas.openxmlformats.org/drawingml/2006/main">
               <a:ext uri="{FF2B5EF4-FFF2-40B4-BE49-F238E27FC236}">
-                <a16:creationId xmlns:a16="http://schemas.microsoft.com/office/drawing/2014/main" id="{231D452A-800B-4380-A032-572AD235BBE0}"/>
+                <a16:creationId xmlns:a16="http://schemas.microsoft.com/office/drawing/2014/main" id="{3EFBE796-5CAC-43EF-8E19-0EAA882B59BB}"/>
               </a:ext>
             </a:extLst>
           </p:cNvPr>
@@ -9775,7 +9783,7 @@
           <p:cNvPr id="14" name="">
             <a:extLst xmlns:a="http://schemas.openxmlformats.org/drawingml/2006/main">
               <a:ext uri="{FF2B5EF4-FFF2-40B4-BE49-F238E27FC236}">
-                <a16:creationId xmlns:a16="http://schemas.microsoft.com/office/drawing/2014/main" id="{FA6EF105-4FB2-480F-AE45-7C40DBDC3842}"/>
+                <a16:creationId xmlns:a16="http://schemas.microsoft.com/office/drawing/2014/main" id="{D9C3399A-AD36-42FB-A78E-4C027678856D}"/>
               </a:ext>
             </a:extLst>
           </p:cNvPr>
@@ -9830,7 +9838,7 @@
     </p:spTree>
     <p:extLst>
       <p:ext uri="{BB962C8B-B14F-4D97-AF65-F5344CB8AC3E}">
-        <p14:creationId xmlns:p14="http://schemas.microsoft.com/office/powerpoint/2010/main" val="1435066963"/>
+        <p14:creationId xmlns:p14="http://schemas.microsoft.com/office/powerpoint/2010/main" val="649856410"/>
       </p:ext>
     </p:extLst>
   </p:cSld>
@@ -10031,7 +10039,7 @@
           <p:cNvPr id="16" name="">
             <a:extLst xmlns:a="http://schemas.openxmlformats.org/drawingml/2006/main">
               <a:ext uri="{FF2B5EF4-FFF2-40B4-BE49-F238E27FC236}">
-                <a16:creationId xmlns:a16="http://schemas.microsoft.com/office/drawing/2014/main" id="{5634CDEF-9F3D-4C60-89AA-334AC2DF4553}"/>
+                <a16:creationId xmlns:a16="http://schemas.microsoft.com/office/drawing/2014/main" id="{1B60327C-7AAA-4030-89D8-10E02DBC8953}"/>
               </a:ext>
             </a:extLst>
           </p:cNvPr>
@@ -10063,7 +10071,7 @@
           <p:cNvPr id="2" name="">
             <a:extLst xmlns:a="http://schemas.openxmlformats.org/drawingml/2006/main">
               <a:ext uri="{FF2B5EF4-FFF2-40B4-BE49-F238E27FC236}">
-                <a16:creationId xmlns:a16="http://schemas.microsoft.com/office/drawing/2014/main" id="{7CE1BFAF-CFCB-4BE1-9BC6-F21ECE7F4E37}"/>
+                <a16:creationId xmlns:a16="http://schemas.microsoft.com/office/drawing/2014/main" id="{2DCE171B-9713-4A3A-AC12-4676B527AA21}"/>
               </a:ext>
             </a:extLst>
           </p:cNvPr>
@@ -10120,7 +10128,7 @@
           <p:cNvPr id="3" name="">
             <a:extLst xmlns:a="http://schemas.openxmlformats.org/drawingml/2006/main">
               <a:ext uri="{FF2B5EF4-FFF2-40B4-BE49-F238E27FC236}">
-                <a16:creationId xmlns:a16="http://schemas.microsoft.com/office/drawing/2014/main" id="{958124E4-C42D-45AD-BB7E-7E895F8BD1FD}"/>
+                <a16:creationId xmlns:a16="http://schemas.microsoft.com/office/drawing/2014/main" id="{A92068D7-DB4D-4535-B70E-18EF6E725C85}"/>
               </a:ext>
             </a:extLst>
           </p:cNvPr>
@@ -10152,7 +10160,7 @@
           <p:cNvPr id="4" name="">
             <a:extLst xmlns:a="http://schemas.openxmlformats.org/drawingml/2006/main">
               <a:ext uri="{FF2B5EF4-FFF2-40B4-BE49-F238E27FC236}">
-                <a16:creationId xmlns:a16="http://schemas.microsoft.com/office/drawing/2014/main" id="{6E528099-F2C5-46D7-B459-FF6E9AA230C2}"/>
+                <a16:creationId xmlns:a16="http://schemas.microsoft.com/office/drawing/2014/main" id="{F4EF438D-9CB3-4014-BDF6-DB209A4E5100}"/>
               </a:ext>
             </a:extLst>
           </p:cNvPr>
@@ -10209,7 +10217,7 @@
           <p:cNvPr id="5" name="">
             <a:extLst xmlns:a="http://schemas.openxmlformats.org/drawingml/2006/main">
               <a:ext uri="{FF2B5EF4-FFF2-40B4-BE49-F238E27FC236}">
-                <a16:creationId xmlns:a16="http://schemas.microsoft.com/office/drawing/2014/main" id="{A44ABAE3-FCF5-4972-A53A-7E7201820925}"/>
+                <a16:creationId xmlns:a16="http://schemas.microsoft.com/office/drawing/2014/main" id="{012C6D99-E6A8-49C8-8B80-46E6BEB4D43A}"/>
               </a:ext>
             </a:extLst>
           </p:cNvPr>
@@ -10266,7 +10274,7 @@
           <p:cNvPr id="6" name="">
             <a:extLst xmlns:a="http://schemas.openxmlformats.org/drawingml/2006/main">
               <a:ext uri="{FF2B5EF4-FFF2-40B4-BE49-F238E27FC236}">
-                <a16:creationId xmlns:a16="http://schemas.microsoft.com/office/drawing/2014/main" id="{157E3987-BE11-4F83-9C2B-BCDE2A121FBE}"/>
+                <a16:creationId xmlns:a16="http://schemas.microsoft.com/office/drawing/2014/main" id="{CE6FA280-2E5E-48E4-A8ED-38ED17A0357E}"/>
               </a:ext>
             </a:extLst>
           </p:cNvPr>
@@ -10323,7 +10331,7 @@
           <p:cNvPr id="7" name="">
             <a:extLst xmlns:a="http://schemas.openxmlformats.org/drawingml/2006/main">
               <a:ext uri="{FF2B5EF4-FFF2-40B4-BE49-F238E27FC236}">
-                <a16:creationId xmlns:a16="http://schemas.microsoft.com/office/drawing/2014/main" id="{00FE6E64-3289-43E9-AB60-841B46EE6611}"/>
+                <a16:creationId xmlns:a16="http://schemas.microsoft.com/office/drawing/2014/main" id="{BB6DD77D-33AF-4F7E-90CA-EEDDDC03BC3E}"/>
               </a:ext>
             </a:extLst>
           </p:cNvPr>
@@ -10355,7 +10363,7 @@
           <p:cNvPr id="8" name="">
             <a:extLst xmlns:a="http://schemas.openxmlformats.org/drawingml/2006/main">
               <a:ext uri="{FF2B5EF4-FFF2-40B4-BE49-F238E27FC236}">
-                <a16:creationId xmlns:a16="http://schemas.microsoft.com/office/drawing/2014/main" id="{1C43CBA3-FF60-4FF4-9DB4-67BB94F0F46A}"/>
+                <a16:creationId xmlns:a16="http://schemas.microsoft.com/office/drawing/2014/main" id="{E2E5815F-8673-4F79-8DAB-9222A3919EA5}"/>
               </a:ext>
             </a:extLst>
           </p:cNvPr>
@@ -10412,7 +10420,7 @@
           <p:cNvPr id="9" name="">
             <a:extLst xmlns:a="http://schemas.openxmlformats.org/drawingml/2006/main">
               <a:ext uri="{FF2B5EF4-FFF2-40B4-BE49-F238E27FC236}">
-                <a16:creationId xmlns:a16="http://schemas.microsoft.com/office/drawing/2014/main" id="{24277FF3-A874-4AE5-8B2E-BDE05CA58E84}"/>
+                <a16:creationId xmlns:a16="http://schemas.microsoft.com/office/drawing/2014/main" id="{5BD0A165-6A0C-41BF-AB3A-2AF817C1D46D}"/>
               </a:ext>
             </a:extLst>
           </p:cNvPr>
@@ -10469,7 +10477,7 @@
           <p:cNvPr id="10" name="">
             <a:extLst xmlns:a="http://schemas.openxmlformats.org/drawingml/2006/main">
               <a:ext uri="{FF2B5EF4-FFF2-40B4-BE49-F238E27FC236}">
-                <a16:creationId xmlns:a16="http://schemas.microsoft.com/office/drawing/2014/main" id="{D04A6695-F90B-4AE6-BD31-CF8C4EC869CE}"/>
+                <a16:creationId xmlns:a16="http://schemas.microsoft.com/office/drawing/2014/main" id="{13E12CF7-1424-4940-9C30-72C583BE4151}"/>
               </a:ext>
             </a:extLst>
           </p:cNvPr>
@@ -10526,7 +10534,7 @@
           <p:cNvPr id="11" name="">
             <a:extLst xmlns:a="http://schemas.openxmlformats.org/drawingml/2006/main">
               <a:ext uri="{FF2B5EF4-FFF2-40B4-BE49-F238E27FC236}">
-                <a16:creationId xmlns:a16="http://schemas.microsoft.com/office/drawing/2014/main" id="{CA96C234-3BDF-4FE0-A1D3-FA94F50F29F8}"/>
+                <a16:creationId xmlns:a16="http://schemas.microsoft.com/office/drawing/2014/main" id="{36C0EF8C-DCD0-4366-AF55-CC726F320CAF}"/>
               </a:ext>
             </a:extLst>
           </p:cNvPr>
@@ -10583,7 +10591,7 @@
           <p:cNvPr id="12" name="">
             <a:extLst xmlns:a="http://schemas.openxmlformats.org/drawingml/2006/main">
               <a:ext uri="{FF2B5EF4-FFF2-40B4-BE49-F238E27FC236}">
-                <a16:creationId xmlns:a16="http://schemas.microsoft.com/office/drawing/2014/main" id="{1D34F4EF-2AFA-486F-BC9D-2E64D76E2A66}"/>
+                <a16:creationId xmlns:a16="http://schemas.microsoft.com/office/drawing/2014/main" id="{70D53212-6423-4166-BEB1-D83BCF005B37}"/>
               </a:ext>
             </a:extLst>
           </p:cNvPr>
@@ -10640,7 +10648,7 @@
           <p:cNvPr id="13" name="">
             <a:extLst xmlns:a="http://schemas.openxmlformats.org/drawingml/2006/main">
               <a:ext uri="{FF2B5EF4-FFF2-40B4-BE49-F238E27FC236}">
-                <a16:creationId xmlns:a16="http://schemas.microsoft.com/office/drawing/2014/main" id="{69972988-9EA6-4C05-B442-2DF150E4C21C}"/>
+                <a16:creationId xmlns:a16="http://schemas.microsoft.com/office/drawing/2014/main" id="{EBC5E774-76B0-4BC7-9781-AC5B7B94BF00}"/>
               </a:ext>
             </a:extLst>
           </p:cNvPr>
@@ -10697,7 +10705,7 @@
           <p:cNvPr id="14" name="">
             <a:extLst xmlns:a="http://schemas.openxmlformats.org/drawingml/2006/main">
               <a:ext uri="{FF2B5EF4-FFF2-40B4-BE49-F238E27FC236}">
-                <a16:creationId xmlns:a16="http://schemas.microsoft.com/office/drawing/2014/main" id="{5DE105E8-88C1-4807-A2FD-19408678BFB1}"/>
+                <a16:creationId xmlns:a16="http://schemas.microsoft.com/office/drawing/2014/main" id="{28C6B472-56E4-4B7F-9D95-F6AF5DEC9ECB}"/>
               </a:ext>
             </a:extLst>
           </p:cNvPr>
@@ -10754,7 +10762,7 @@
           <p:cNvPr id="15" name="">
             <a:extLst xmlns:a="http://schemas.openxmlformats.org/drawingml/2006/main">
               <a:ext uri="{FF2B5EF4-FFF2-40B4-BE49-F238E27FC236}">
-                <a16:creationId xmlns:a16="http://schemas.microsoft.com/office/drawing/2014/main" id="{F64EB4D5-CA76-4CEA-BC16-746E46599C85}"/>
+                <a16:creationId xmlns:a16="http://schemas.microsoft.com/office/drawing/2014/main" id="{D3840C58-C516-4B94-B809-B628286DB361}"/>
               </a:ext>
             </a:extLst>
           </p:cNvPr>
@@ -10809,7 +10817,7 @@
     </p:spTree>
     <p:extLst>
       <p:ext uri="{BB962C8B-B14F-4D97-AF65-F5344CB8AC3E}">
-        <p14:creationId xmlns:p14="http://schemas.microsoft.com/office/powerpoint/2010/main" val="1861204973"/>
+        <p14:creationId xmlns:p14="http://schemas.microsoft.com/office/powerpoint/2010/main" val="1204520479"/>
       </p:ext>
     </p:extLst>
   </p:cSld>
@@ -10964,7 +10972,7 @@
           <p:cNvPr id="16" name="">
             <a:extLst xmlns:a="http://schemas.openxmlformats.org/drawingml/2006/main">
               <a:ext uri="{FF2B5EF4-FFF2-40B4-BE49-F238E27FC236}">
-                <a16:creationId xmlns:a16="http://schemas.microsoft.com/office/drawing/2014/main" id="{1A430456-F13C-4754-BE32-F845CCB1CA67}"/>
+                <a16:creationId xmlns:a16="http://schemas.microsoft.com/office/drawing/2014/main" id="{B3872A12-DD66-4D79-9739-7749C1610503}"/>
               </a:ext>
             </a:extLst>
           </p:cNvPr>
@@ -10996,7 +11004,7 @@
           <p:cNvPr id="2" name="">
             <a:extLst xmlns:a="http://schemas.openxmlformats.org/drawingml/2006/main">
               <a:ext uri="{FF2B5EF4-FFF2-40B4-BE49-F238E27FC236}">
-                <a16:creationId xmlns:a16="http://schemas.microsoft.com/office/drawing/2014/main" id="{D88E030A-68F6-4EDF-89E6-62547CAD0DD1}"/>
+                <a16:creationId xmlns:a16="http://schemas.microsoft.com/office/drawing/2014/main" id="{794E9C89-FE97-4AED-8406-50C86BD1D014}"/>
               </a:ext>
             </a:extLst>
           </p:cNvPr>
@@ -11053,7 +11061,7 @@
           <p:cNvPr id="3" name="">
             <a:extLst xmlns:a="http://schemas.openxmlformats.org/drawingml/2006/main">
               <a:ext uri="{FF2B5EF4-FFF2-40B4-BE49-F238E27FC236}">
-                <a16:creationId xmlns:a16="http://schemas.microsoft.com/office/drawing/2014/main" id="{536F0B68-3100-4FA2-9A86-C5C9309A226C}"/>
+                <a16:creationId xmlns:a16="http://schemas.microsoft.com/office/drawing/2014/main" id="{433E236B-8A95-440D-8FD2-EF514C11E09A}"/>
               </a:ext>
             </a:extLst>
           </p:cNvPr>
@@ -11085,7 +11093,7 @@
           <p:cNvPr id="4" name="">
             <a:extLst xmlns:a="http://schemas.openxmlformats.org/drawingml/2006/main">
               <a:ext uri="{FF2B5EF4-FFF2-40B4-BE49-F238E27FC236}">
-                <a16:creationId xmlns:a16="http://schemas.microsoft.com/office/drawing/2014/main" id="{D00B6FFD-F79B-40CC-92FD-D6426F72C85E}"/>
+                <a16:creationId xmlns:a16="http://schemas.microsoft.com/office/drawing/2014/main" id="{D01E695F-DCE6-4038-B970-0660857C5CCC}"/>
               </a:ext>
             </a:extLst>
           </p:cNvPr>
@@ -11142,7 +11150,7 @@
           <p:cNvPr id="5" name="">
             <a:extLst xmlns:a="http://schemas.openxmlformats.org/drawingml/2006/main">
               <a:ext uri="{FF2B5EF4-FFF2-40B4-BE49-F238E27FC236}">
-                <a16:creationId xmlns:a16="http://schemas.microsoft.com/office/drawing/2014/main" id="{8A2F3D58-1D15-4C1A-81EB-95E20DBCDAF9}"/>
+                <a16:creationId xmlns:a16="http://schemas.microsoft.com/office/drawing/2014/main" id="{B9384242-989A-42AD-B448-A3F0960291BF}"/>
               </a:ext>
             </a:extLst>
           </p:cNvPr>
@@ -11199,7 +11207,7 @@
           <p:cNvPr id="6" name="">
             <a:extLst xmlns:a="http://schemas.openxmlformats.org/drawingml/2006/main">
               <a:ext uri="{FF2B5EF4-FFF2-40B4-BE49-F238E27FC236}">
-                <a16:creationId xmlns:a16="http://schemas.microsoft.com/office/drawing/2014/main" id="{5F497B93-2422-4613-84F7-0857A8E444D9}"/>
+                <a16:creationId xmlns:a16="http://schemas.microsoft.com/office/drawing/2014/main" id="{8F00333D-50EC-447C-9256-EFB3AF585E20}"/>
               </a:ext>
             </a:extLst>
           </p:cNvPr>
@@ -11256,7 +11264,7 @@
           <p:cNvPr id="7" name="">
             <a:extLst xmlns:a="http://schemas.openxmlformats.org/drawingml/2006/main">
               <a:ext uri="{FF2B5EF4-FFF2-40B4-BE49-F238E27FC236}">
-                <a16:creationId xmlns:a16="http://schemas.microsoft.com/office/drawing/2014/main" id="{2A5D32E8-246C-4604-9011-0DCA73E39510}"/>
+                <a16:creationId xmlns:a16="http://schemas.microsoft.com/office/drawing/2014/main" id="{D43A458D-5D06-4FF5-B377-33FCFB203009}"/>
               </a:ext>
             </a:extLst>
           </p:cNvPr>
@@ -11288,7 +11296,7 @@
           <p:cNvPr id="8" name="">
             <a:extLst xmlns:a="http://schemas.openxmlformats.org/drawingml/2006/main">
               <a:ext uri="{FF2B5EF4-FFF2-40B4-BE49-F238E27FC236}">
-                <a16:creationId xmlns:a16="http://schemas.microsoft.com/office/drawing/2014/main" id="{BE5CDBA9-D434-4CE7-BF4E-E0A2468E71B0}"/>
+                <a16:creationId xmlns:a16="http://schemas.microsoft.com/office/drawing/2014/main" id="{49596754-D400-4D74-9F80-93C892AC64BC}"/>
               </a:ext>
             </a:extLst>
           </p:cNvPr>
@@ -11345,7 +11353,7 @@
           <p:cNvPr id="9" name="">
             <a:extLst xmlns:a="http://schemas.openxmlformats.org/drawingml/2006/main">
               <a:ext uri="{FF2B5EF4-FFF2-40B4-BE49-F238E27FC236}">
-                <a16:creationId xmlns:a16="http://schemas.microsoft.com/office/drawing/2014/main" id="{D15BBCE1-C31D-42C9-A146-8570A41AC1EF}"/>
+                <a16:creationId xmlns:a16="http://schemas.microsoft.com/office/drawing/2014/main" id="{1FB275F5-F990-4633-88BE-93246F0121A2}"/>
               </a:ext>
             </a:extLst>
           </p:cNvPr>
@@ -11406,7 +11414,7 @@
           <p:nvPr/>
         </p:nvPicPr>
         <p:blipFill>
-          <a:blip xmlns:r="http://schemas.openxmlformats.org/officeDocument/2006/relationships" xmlns:a="http://schemas.openxmlformats.org/drawingml/2006/main" r:embed="R1a0d5ddb42e54ac4"/>
+          <a:blip xmlns:r="http://schemas.openxmlformats.org/officeDocument/2006/relationships" xmlns:a="http://schemas.openxmlformats.org/drawingml/2006/main" r:embed="Ra0a7f1133b604646"/>
           <a:stretch xmlns:a="http://schemas.openxmlformats.org/drawingml/2006/main"/>
         </p:blipFill>
         <p:spPr>
@@ -11424,7 +11432,7 @@
           <p:cNvPr id="11" name="">
             <a:extLst xmlns:a="http://schemas.openxmlformats.org/drawingml/2006/main">
               <a:ext uri="{FF2B5EF4-FFF2-40B4-BE49-F238E27FC236}">
-                <a16:creationId xmlns:a16="http://schemas.microsoft.com/office/drawing/2014/main" id="{9AB9ECB6-4D46-4366-8535-BA0260A0C0AB}"/>
+                <a16:creationId xmlns:a16="http://schemas.microsoft.com/office/drawing/2014/main" id="{678F2C84-615F-4AD0-8CD7-E443F43B05F6}"/>
               </a:ext>
             </a:extLst>
           </p:cNvPr>
@@ -11481,7 +11489,7 @@
           <p:cNvPr id="12" name="">
             <a:extLst xmlns:a="http://schemas.openxmlformats.org/drawingml/2006/main">
               <a:ext uri="{FF2B5EF4-FFF2-40B4-BE49-F238E27FC236}">
-                <a16:creationId xmlns:a16="http://schemas.microsoft.com/office/drawing/2014/main" id="{206D52D3-72AB-4E2B-92F3-0F263814EF6F}"/>
+                <a16:creationId xmlns:a16="http://schemas.microsoft.com/office/drawing/2014/main" id="{BFF679F5-C398-4A1E-9A0E-BC8B63053CA0}"/>
               </a:ext>
             </a:extLst>
           </p:cNvPr>
@@ -11538,7 +11546,7 @@
           <p:cNvPr id="13" name="">
             <a:extLst xmlns:a="http://schemas.openxmlformats.org/drawingml/2006/main">
               <a:ext uri="{FF2B5EF4-FFF2-40B4-BE49-F238E27FC236}">
-                <a16:creationId xmlns:a16="http://schemas.microsoft.com/office/drawing/2014/main" id="{EB7A2CA3-1D63-4525-BD28-5D2A62AD760A}"/>
+                <a16:creationId xmlns:a16="http://schemas.microsoft.com/office/drawing/2014/main" id="{3CC3F3C2-E7A2-4BD8-B552-5E21DC200A3A}"/>
               </a:ext>
             </a:extLst>
           </p:cNvPr>
@@ -11570,7 +11578,7 @@
           <p:cNvPr id="14" name="">
             <a:extLst xmlns:a="http://schemas.openxmlformats.org/drawingml/2006/main">
               <a:ext uri="{FF2B5EF4-FFF2-40B4-BE49-F238E27FC236}">
-                <a16:creationId xmlns:a16="http://schemas.microsoft.com/office/drawing/2014/main" id="{01F46B54-FAC7-474E-BAA6-F3FB33EC2E51}"/>
+                <a16:creationId xmlns:a16="http://schemas.microsoft.com/office/drawing/2014/main" id="{F114A924-3A31-4670-8589-469A4A5FDA52}"/>
               </a:ext>
             </a:extLst>
           </p:cNvPr>
@@ -11627,7 +11635,7 @@
           <p:cNvPr id="15" name="">
             <a:extLst xmlns:a="http://schemas.openxmlformats.org/drawingml/2006/main">
               <a:ext uri="{FF2B5EF4-FFF2-40B4-BE49-F238E27FC236}">
-                <a16:creationId xmlns:a16="http://schemas.microsoft.com/office/drawing/2014/main" id="{082B8C91-E727-4491-9EF9-4E95356BA704}"/>
+                <a16:creationId xmlns:a16="http://schemas.microsoft.com/office/drawing/2014/main" id="{124D8D94-C7CA-4D85-8C70-CC85E5B96F36}"/>
               </a:ext>
             </a:extLst>
           </p:cNvPr>
@@ -11682,7 +11690,7 @@
     </p:spTree>
     <p:extLst>
       <p:ext uri="{BB962C8B-B14F-4D97-AF65-F5344CB8AC3E}">
-        <p14:creationId xmlns:p14="http://schemas.microsoft.com/office/powerpoint/2010/main" val="1318337771"/>
+        <p14:creationId xmlns:p14="http://schemas.microsoft.com/office/powerpoint/2010/main" val="1948914985"/>
       </p:ext>
     </p:extLst>
   </p:cSld>
@@ -11837,7 +11845,7 @@
           <p:cNvPr id="23" name="">
             <a:extLst xmlns:a="http://schemas.openxmlformats.org/drawingml/2006/main">
               <a:ext uri="{FF2B5EF4-FFF2-40B4-BE49-F238E27FC236}">
-                <a16:creationId xmlns:a16="http://schemas.microsoft.com/office/drawing/2014/main" id="{3AE4B530-8CCF-4609-A12C-699B1A9B24C1}"/>
+                <a16:creationId xmlns:a16="http://schemas.microsoft.com/office/drawing/2014/main" id="{3F0A7E21-2094-4CFF-B9B2-CD2F27E020F9}"/>
               </a:ext>
             </a:extLst>
           </p:cNvPr>
@@ -11869,7 +11877,7 @@
           <p:cNvPr id="2" name="">
             <a:extLst xmlns:a="http://schemas.openxmlformats.org/drawingml/2006/main">
               <a:ext uri="{FF2B5EF4-FFF2-40B4-BE49-F238E27FC236}">
-                <a16:creationId xmlns:a16="http://schemas.microsoft.com/office/drawing/2014/main" id="{22ABF1D1-D0D5-4D8D-9C43-B7D28AD3ECD6}"/>
+                <a16:creationId xmlns:a16="http://schemas.microsoft.com/office/drawing/2014/main" id="{D2DB2849-4995-4F35-8987-2F650D52539B}"/>
               </a:ext>
             </a:extLst>
           </p:cNvPr>
@@ -11926,7 +11934,7 @@
           <p:cNvPr id="3" name="">
             <a:extLst xmlns:a="http://schemas.openxmlformats.org/drawingml/2006/main">
               <a:ext uri="{FF2B5EF4-FFF2-40B4-BE49-F238E27FC236}">
-                <a16:creationId xmlns:a16="http://schemas.microsoft.com/office/drawing/2014/main" id="{972A4AC5-2201-4FE2-909D-C95707C8C5F0}"/>
+                <a16:creationId xmlns:a16="http://schemas.microsoft.com/office/drawing/2014/main" id="{0D5BD0E4-CB34-4466-A96C-BC6D775A616D}"/>
               </a:ext>
             </a:extLst>
           </p:cNvPr>
@@ -11958,7 +11966,7 @@
           <p:cNvPr id="4" name="">
             <a:extLst xmlns:a="http://schemas.openxmlformats.org/drawingml/2006/main">
               <a:ext uri="{FF2B5EF4-FFF2-40B4-BE49-F238E27FC236}">
-                <a16:creationId xmlns:a16="http://schemas.microsoft.com/office/drawing/2014/main" id="{111B0BE7-A6D6-4319-9FE2-F7D600A17B1A}"/>
+                <a16:creationId xmlns:a16="http://schemas.microsoft.com/office/drawing/2014/main" id="{EBC275CA-9308-4B9E-9873-611560C1D575}"/>
               </a:ext>
             </a:extLst>
           </p:cNvPr>
@@ -12015,7 +12023,7 @@
           <p:cNvPr id="5" name="">
             <a:extLst xmlns:a="http://schemas.openxmlformats.org/drawingml/2006/main">
               <a:ext uri="{FF2B5EF4-FFF2-40B4-BE49-F238E27FC236}">
-                <a16:creationId xmlns:a16="http://schemas.microsoft.com/office/drawing/2014/main" id="{7D1789E3-FA77-46FB-87F0-B9D458266196}"/>
+                <a16:creationId xmlns:a16="http://schemas.microsoft.com/office/drawing/2014/main" id="{FD85F9F7-0CE7-4614-AC01-DA040AE94321}"/>
               </a:ext>
             </a:extLst>
           </p:cNvPr>
@@ -12072,7 +12080,7 @@
           <p:cNvPr id="6" name="">
             <a:extLst xmlns:a="http://schemas.openxmlformats.org/drawingml/2006/main">
               <a:ext uri="{FF2B5EF4-FFF2-40B4-BE49-F238E27FC236}">
-                <a16:creationId xmlns:a16="http://schemas.microsoft.com/office/drawing/2014/main" id="{E813687C-BF71-496C-BF17-4BF88DFE3D1C}"/>
+                <a16:creationId xmlns:a16="http://schemas.microsoft.com/office/drawing/2014/main" id="{65B9A278-1065-4CF3-B20D-7F3CABA78FFB}"/>
               </a:ext>
             </a:extLst>
           </p:cNvPr>
@@ -12129,7 +12137,7 @@
           <p:cNvPr id="7" name="">
             <a:extLst xmlns:a="http://schemas.openxmlformats.org/drawingml/2006/main">
               <a:ext uri="{FF2B5EF4-FFF2-40B4-BE49-F238E27FC236}">
-                <a16:creationId xmlns:a16="http://schemas.microsoft.com/office/drawing/2014/main" id="{C47674CC-279A-4AEE-8BD6-8768DE516930}"/>
+                <a16:creationId xmlns:a16="http://schemas.microsoft.com/office/drawing/2014/main" id="{800DBA02-E1E7-4544-AF48-7457DD594D3D}"/>
               </a:ext>
             </a:extLst>
           </p:cNvPr>
@@ -12161,7 +12169,7 @@
           <p:cNvPr id="8" name="">
             <a:extLst xmlns:a="http://schemas.openxmlformats.org/drawingml/2006/main">
               <a:ext uri="{FF2B5EF4-FFF2-40B4-BE49-F238E27FC236}">
-                <a16:creationId xmlns:a16="http://schemas.microsoft.com/office/drawing/2014/main" id="{D7F0D53F-485C-44E0-ACDF-C946C3027DE1}"/>
+                <a16:creationId xmlns:a16="http://schemas.microsoft.com/office/drawing/2014/main" id="{60FC6E56-6417-422B-845D-182A8B2FBCB3}"/>
               </a:ext>
             </a:extLst>
           </p:cNvPr>
@@ -12218,7 +12226,7 @@
           <p:cNvPr id="9" name="">
             <a:extLst xmlns:a="http://schemas.openxmlformats.org/drawingml/2006/main">
               <a:ext uri="{FF2B5EF4-FFF2-40B4-BE49-F238E27FC236}">
-                <a16:creationId xmlns:a16="http://schemas.microsoft.com/office/drawing/2014/main" id="{E3088331-5EFD-4D3C-A1EE-C7E1EAF52024}"/>
+                <a16:creationId xmlns:a16="http://schemas.microsoft.com/office/drawing/2014/main" id="{FAE76898-E69F-44E2-854B-FB62F8552E8A}"/>
               </a:ext>
             </a:extLst>
           </p:cNvPr>
@@ -12275,7 +12283,7 @@
           <p:cNvPr id="10" name="">
             <a:extLst xmlns:a="http://schemas.openxmlformats.org/drawingml/2006/main">
               <a:ext uri="{FF2B5EF4-FFF2-40B4-BE49-F238E27FC236}">
-                <a16:creationId xmlns:a16="http://schemas.microsoft.com/office/drawing/2014/main" id="{3126EC08-8EF7-485D-9538-FE340B350753}"/>
+                <a16:creationId xmlns:a16="http://schemas.microsoft.com/office/drawing/2014/main" id="{81F290F4-CFC3-483B-8BB5-B7D0EE363E59}"/>
               </a:ext>
             </a:extLst>
           </p:cNvPr>
@@ -12309,7 +12317,7 @@
           <p:cNvPr id="11" name="">
             <a:extLst xmlns:a="http://schemas.openxmlformats.org/drawingml/2006/main">
               <a:ext uri="{FF2B5EF4-FFF2-40B4-BE49-F238E27FC236}">
-                <a16:creationId xmlns:a16="http://schemas.microsoft.com/office/drawing/2014/main" id="{C14F1DC8-5733-4EE5-910B-95E7A8C2AD06}"/>
+                <a16:creationId xmlns:a16="http://schemas.microsoft.com/office/drawing/2014/main" id="{F471D763-83DE-4363-BFB0-D96DE37B6E06}"/>
               </a:ext>
             </a:extLst>
           </p:cNvPr>
@@ -12341,7 +12349,7 @@
           <p:cNvPr id="12" name="">
             <a:extLst xmlns:a="http://schemas.openxmlformats.org/drawingml/2006/main">
               <a:ext uri="{FF2B5EF4-FFF2-40B4-BE49-F238E27FC236}">
-                <a16:creationId xmlns:a16="http://schemas.microsoft.com/office/drawing/2014/main" id="{A28A1FB1-5038-433F-91A0-1AE68BC7760D}"/>
+                <a16:creationId xmlns:a16="http://schemas.microsoft.com/office/drawing/2014/main" id="{85966E7B-1B53-4A6E-BCA1-DF1BA5BEB037}"/>
               </a:ext>
             </a:extLst>
           </p:cNvPr>
@@ -12398,7 +12406,7 @@
           <p:cNvPr id="13" name="">
             <a:extLst xmlns:a="http://schemas.openxmlformats.org/drawingml/2006/main">
               <a:ext uri="{FF2B5EF4-FFF2-40B4-BE49-F238E27FC236}">
-                <a16:creationId xmlns:a16="http://schemas.microsoft.com/office/drawing/2014/main" id="{873976DA-4C24-46D3-A766-2948808EDD81}"/>
+                <a16:creationId xmlns:a16="http://schemas.microsoft.com/office/drawing/2014/main" id="{37102489-7A3D-4B44-89EB-6EA4F1DF6C66}"/>
               </a:ext>
             </a:extLst>
           </p:cNvPr>
@@ -12455,7 +12463,7 @@
           <p:cNvPr id="14" name="">
             <a:extLst xmlns:a="http://schemas.openxmlformats.org/drawingml/2006/main">
               <a:ext uri="{FF2B5EF4-FFF2-40B4-BE49-F238E27FC236}">
-                <a16:creationId xmlns:a16="http://schemas.microsoft.com/office/drawing/2014/main" id="{652838A1-8D5A-44F9-A5D1-25821E0D25FB}"/>
+                <a16:creationId xmlns:a16="http://schemas.microsoft.com/office/drawing/2014/main" id="{2C323D01-4D24-4598-AA8C-EB6D6C19BEA9}"/>
               </a:ext>
             </a:extLst>
           </p:cNvPr>
@@ -12489,7 +12497,7 @@
           <p:cNvPr id="15" name="">
             <a:extLst xmlns:a="http://schemas.openxmlformats.org/drawingml/2006/main">
               <a:ext uri="{FF2B5EF4-FFF2-40B4-BE49-F238E27FC236}">
-                <a16:creationId xmlns:a16="http://schemas.microsoft.com/office/drawing/2014/main" id="{B108AB82-8091-4514-97FA-FDCBD869990D}"/>
+                <a16:creationId xmlns:a16="http://schemas.microsoft.com/office/drawing/2014/main" id="{0212277D-6741-4F58-9ADD-62FB451C6E7F}"/>
               </a:ext>
             </a:extLst>
           </p:cNvPr>
@@ -12521,7 +12529,7 @@
           <p:cNvPr id="16" name="">
             <a:extLst xmlns:a="http://schemas.openxmlformats.org/drawingml/2006/main">
               <a:ext uri="{FF2B5EF4-FFF2-40B4-BE49-F238E27FC236}">
-                <a16:creationId xmlns:a16="http://schemas.microsoft.com/office/drawing/2014/main" id="{67F64248-9069-4D01-81D6-FB2833CCC234}"/>
+                <a16:creationId xmlns:a16="http://schemas.microsoft.com/office/drawing/2014/main" id="{CC5DBAE2-60E8-4DEC-BEAD-3FB2DC5A2466}"/>
               </a:ext>
             </a:extLst>
           </p:cNvPr>
@@ -12578,7 +12586,7 @@
           <p:cNvPr id="17" name="">
             <a:extLst xmlns:a="http://schemas.openxmlformats.org/drawingml/2006/main">
               <a:ext uri="{FF2B5EF4-FFF2-40B4-BE49-F238E27FC236}">
-                <a16:creationId xmlns:a16="http://schemas.microsoft.com/office/drawing/2014/main" id="{CA1EE664-3003-491B-BA5A-59377C5C1FEC}"/>
+                <a16:creationId xmlns:a16="http://schemas.microsoft.com/office/drawing/2014/main" id="{5C1FB7FE-42C7-44D6-BA09-9275F44C9916}"/>
               </a:ext>
             </a:extLst>
           </p:cNvPr>
@@ -12635,7 +12643,7 @@
           <p:cNvPr id="18" name="">
             <a:extLst xmlns:a="http://schemas.openxmlformats.org/drawingml/2006/main">
               <a:ext uri="{FF2B5EF4-FFF2-40B4-BE49-F238E27FC236}">
-                <a16:creationId xmlns:a16="http://schemas.microsoft.com/office/drawing/2014/main" id="{CFC5B20E-27BF-4A41-A2CB-38300D0B4B08}"/>
+                <a16:creationId xmlns:a16="http://schemas.microsoft.com/office/drawing/2014/main" id="{E483C44E-482E-44D8-9A69-1EDED223B6CC}"/>
               </a:ext>
             </a:extLst>
           </p:cNvPr>
@@ -12669,7 +12677,7 @@
           <p:cNvPr id="19" name="">
             <a:extLst xmlns:a="http://schemas.openxmlformats.org/drawingml/2006/main">
               <a:ext uri="{FF2B5EF4-FFF2-40B4-BE49-F238E27FC236}">
-                <a16:creationId xmlns:a16="http://schemas.microsoft.com/office/drawing/2014/main" id="{64659170-D501-4448-9E63-780B9931B1F6}"/>
+                <a16:creationId xmlns:a16="http://schemas.microsoft.com/office/drawing/2014/main" id="{329E794F-54E1-4D19-87E9-1B71EEB8DBEA}"/>
               </a:ext>
             </a:extLst>
           </p:cNvPr>
@@ -12701,7 +12709,7 @@
           <p:cNvPr id="20" name="">
             <a:extLst xmlns:a="http://schemas.openxmlformats.org/drawingml/2006/main">
               <a:ext uri="{FF2B5EF4-FFF2-40B4-BE49-F238E27FC236}">
-                <a16:creationId xmlns:a16="http://schemas.microsoft.com/office/drawing/2014/main" id="{FFC4BD4F-C19A-446E-8BE6-DFA85240519D}"/>
+                <a16:creationId xmlns:a16="http://schemas.microsoft.com/office/drawing/2014/main" id="{E24F421C-25B2-4B49-AD90-D6D5B346DAB6}"/>
               </a:ext>
             </a:extLst>
           </p:cNvPr>
@@ -12758,7 +12766,7 @@
           <p:cNvPr id="21" name="">
             <a:extLst xmlns:a="http://schemas.openxmlformats.org/drawingml/2006/main">
               <a:ext uri="{FF2B5EF4-FFF2-40B4-BE49-F238E27FC236}">
-                <a16:creationId xmlns:a16="http://schemas.microsoft.com/office/drawing/2014/main" id="{6521A885-B798-48AC-A94F-7B0D7C0FD6D3}"/>
+                <a16:creationId xmlns:a16="http://schemas.microsoft.com/office/drawing/2014/main" id="{DD0619CE-B947-4896-BD52-348BA987B4DB}"/>
               </a:ext>
             </a:extLst>
           </p:cNvPr>
@@ -12815,7 +12823,7 @@
           <p:cNvPr id="22" name="">
             <a:extLst xmlns:a="http://schemas.openxmlformats.org/drawingml/2006/main">
               <a:ext uri="{FF2B5EF4-FFF2-40B4-BE49-F238E27FC236}">
-                <a16:creationId xmlns:a16="http://schemas.microsoft.com/office/drawing/2014/main" id="{9D83FC65-4699-4D99-B830-FD52EB60654A}"/>
+                <a16:creationId xmlns:a16="http://schemas.microsoft.com/office/drawing/2014/main" id="{A167FB95-81BD-494A-A6E0-58F5DF12AE1C}"/>
               </a:ext>
             </a:extLst>
           </p:cNvPr>
@@ -12870,7 +12878,7 @@
     </p:spTree>
     <p:extLst>
       <p:ext uri="{BB962C8B-B14F-4D97-AF65-F5344CB8AC3E}">
-        <p14:creationId xmlns:p14="http://schemas.microsoft.com/office/powerpoint/2010/main" val="907775276"/>
+        <p14:creationId xmlns:p14="http://schemas.microsoft.com/office/powerpoint/2010/main" val="358883404"/>
       </p:ext>
     </p:extLst>
   </p:cSld>
@@ -13071,7 +13079,7 @@
           <p:cNvPr id="22" name="">
             <a:extLst xmlns:a="http://schemas.openxmlformats.org/drawingml/2006/main">
               <a:ext uri="{FF2B5EF4-FFF2-40B4-BE49-F238E27FC236}">
-                <a16:creationId xmlns:a16="http://schemas.microsoft.com/office/drawing/2014/main" id="{667DF413-43BE-4AA8-A42F-E64E10783DD3}"/>
+                <a16:creationId xmlns:a16="http://schemas.microsoft.com/office/drawing/2014/main" id="{172E7727-88EA-4944-AE16-BD69544D72F7}"/>
               </a:ext>
             </a:extLst>
           </p:cNvPr>
@@ -13103,7 +13111,7 @@
           <p:cNvPr id="2" name="">
             <a:extLst xmlns:a="http://schemas.openxmlformats.org/drawingml/2006/main">
               <a:ext uri="{FF2B5EF4-FFF2-40B4-BE49-F238E27FC236}">
-                <a16:creationId xmlns:a16="http://schemas.microsoft.com/office/drawing/2014/main" id="{9B8C7E79-2C5A-48E2-BA42-596F04E8B96F}"/>
+                <a16:creationId xmlns:a16="http://schemas.microsoft.com/office/drawing/2014/main" id="{3C4BDA17-C5C1-4AAA-A1C5-1E2D2C906AA2}"/>
               </a:ext>
             </a:extLst>
           </p:cNvPr>
@@ -13160,7 +13168,7 @@
           <p:cNvPr id="3" name="">
             <a:extLst xmlns:a="http://schemas.openxmlformats.org/drawingml/2006/main">
               <a:ext uri="{FF2B5EF4-FFF2-40B4-BE49-F238E27FC236}">
-                <a16:creationId xmlns:a16="http://schemas.microsoft.com/office/drawing/2014/main" id="{EC65157D-B269-41AE-9DBA-4F6FD8C55539}"/>
+                <a16:creationId xmlns:a16="http://schemas.microsoft.com/office/drawing/2014/main" id="{333BCC39-51E7-40BC-812C-53BEC0904590}"/>
               </a:ext>
             </a:extLst>
           </p:cNvPr>
@@ -13192,7 +13200,7 @@
           <p:cNvPr id="4" name="">
             <a:extLst xmlns:a="http://schemas.openxmlformats.org/drawingml/2006/main">
               <a:ext uri="{FF2B5EF4-FFF2-40B4-BE49-F238E27FC236}">
-                <a16:creationId xmlns:a16="http://schemas.microsoft.com/office/drawing/2014/main" id="{74B062E0-9919-4781-9F75-25BF83877741}"/>
+                <a16:creationId xmlns:a16="http://schemas.microsoft.com/office/drawing/2014/main" id="{54EF5123-7AA0-484F-95B7-D6A51F1C980C}"/>
               </a:ext>
             </a:extLst>
           </p:cNvPr>
@@ -13249,7 +13257,7 @@
           <p:cNvPr id="5" name="">
             <a:extLst xmlns:a="http://schemas.openxmlformats.org/drawingml/2006/main">
               <a:ext uri="{FF2B5EF4-FFF2-40B4-BE49-F238E27FC236}">
-                <a16:creationId xmlns:a16="http://schemas.microsoft.com/office/drawing/2014/main" id="{27F41B67-67B3-4CCE-B08F-0FB8E2084D1F}"/>
+                <a16:creationId xmlns:a16="http://schemas.microsoft.com/office/drawing/2014/main" id="{AF203A8E-A09D-4612-8D10-79F4EC7AB4EC}"/>
               </a:ext>
             </a:extLst>
           </p:cNvPr>
@@ -13306,7 +13314,7 @@
           <p:cNvPr id="6" name="">
             <a:extLst xmlns:a="http://schemas.openxmlformats.org/drawingml/2006/main">
               <a:ext uri="{FF2B5EF4-FFF2-40B4-BE49-F238E27FC236}">
-                <a16:creationId xmlns:a16="http://schemas.microsoft.com/office/drawing/2014/main" id="{BD8389DA-5E54-4A33-93B0-8B1E79D6C8BB}"/>
+                <a16:creationId xmlns:a16="http://schemas.microsoft.com/office/drawing/2014/main" id="{CB696367-CED8-4822-A05B-C5205D79249F}"/>
               </a:ext>
             </a:extLst>
           </p:cNvPr>
@@ -13363,7 +13371,7 @@
           <p:cNvPr id="7" name="">
             <a:extLst xmlns:a="http://schemas.openxmlformats.org/drawingml/2006/main">
               <a:ext uri="{FF2B5EF4-FFF2-40B4-BE49-F238E27FC236}">
-                <a16:creationId xmlns:a16="http://schemas.microsoft.com/office/drawing/2014/main" id="{AE5FC102-61FE-4DE4-A646-EB982BE24A3B}"/>
+                <a16:creationId xmlns:a16="http://schemas.microsoft.com/office/drawing/2014/main" id="{0AD3360C-1884-4A4E-BC68-286D39EF7014}"/>
               </a:ext>
             </a:extLst>
           </p:cNvPr>
@@ -13395,7 +13403,7 @@
           <p:cNvPr id="8" name="">
             <a:extLst xmlns:a="http://schemas.openxmlformats.org/drawingml/2006/main">
               <a:ext uri="{FF2B5EF4-FFF2-40B4-BE49-F238E27FC236}">
-                <a16:creationId xmlns:a16="http://schemas.microsoft.com/office/drawing/2014/main" id="{D0255AD5-C49F-4FC8-9411-24EEE4689804}"/>
+                <a16:creationId xmlns:a16="http://schemas.microsoft.com/office/drawing/2014/main" id="{2C79370D-16A1-4C43-BA8C-ED32611118ED}"/>
               </a:ext>
             </a:extLst>
           </p:cNvPr>
@@ -13452,7 +13460,7 @@
           <p:cNvPr id="9" name="">
             <a:extLst xmlns:a="http://schemas.openxmlformats.org/drawingml/2006/main">
               <a:ext uri="{FF2B5EF4-FFF2-40B4-BE49-F238E27FC236}">
-                <a16:creationId xmlns:a16="http://schemas.microsoft.com/office/drawing/2014/main" id="{CBF3EA01-04E2-450A-B6A2-35699871E35F}"/>
+                <a16:creationId xmlns:a16="http://schemas.microsoft.com/office/drawing/2014/main" id="{9A07FA32-F3F6-4EDA-888A-7916DAAC324A}"/>
               </a:ext>
             </a:extLst>
           </p:cNvPr>
@@ -13509,7 +13517,7 @@
           <p:cNvPr id="10" name="">
             <a:extLst xmlns:a="http://schemas.openxmlformats.org/drawingml/2006/main">
               <a:ext uri="{FF2B5EF4-FFF2-40B4-BE49-F238E27FC236}">
-                <a16:creationId xmlns:a16="http://schemas.microsoft.com/office/drawing/2014/main" id="{4494CB61-E305-49A7-AF70-F9146EDC0C26}"/>
+                <a16:creationId xmlns:a16="http://schemas.microsoft.com/office/drawing/2014/main" id="{273E6947-EF59-4DE5-9A19-DB528588D3D2}"/>
               </a:ext>
             </a:extLst>
           </p:cNvPr>
@@ -13543,7 +13551,7 @@
           <p:cNvPr id="11" name="">
             <a:extLst xmlns:a="http://schemas.openxmlformats.org/drawingml/2006/main">
               <a:ext uri="{FF2B5EF4-FFF2-40B4-BE49-F238E27FC236}">
-                <a16:creationId xmlns:a16="http://schemas.microsoft.com/office/drawing/2014/main" id="{C18CC4E6-352B-4F9F-80EE-0BE5DD45D832}"/>
+                <a16:creationId xmlns:a16="http://schemas.microsoft.com/office/drawing/2014/main" id="{53E67FE6-BC8B-490C-A31E-731F768AB897}"/>
               </a:ext>
             </a:extLst>
           </p:cNvPr>
@@ -13575,7 +13583,7 @@
           <p:cNvPr id="12" name="">
             <a:extLst xmlns:a="http://schemas.openxmlformats.org/drawingml/2006/main">
               <a:ext uri="{FF2B5EF4-FFF2-40B4-BE49-F238E27FC236}">
-                <a16:creationId xmlns:a16="http://schemas.microsoft.com/office/drawing/2014/main" id="{25F19DB0-F654-419D-BF83-19465CD0C16A}"/>
+                <a16:creationId xmlns:a16="http://schemas.microsoft.com/office/drawing/2014/main" id="{5FBAC51E-9CA6-43FE-A394-24883A809C86}"/>
               </a:ext>
             </a:extLst>
           </p:cNvPr>
@@ -13632,7 +13640,7 @@
           <p:cNvPr id="13" name="">
             <a:extLst xmlns:a="http://schemas.openxmlformats.org/drawingml/2006/main">
               <a:ext uri="{FF2B5EF4-FFF2-40B4-BE49-F238E27FC236}">
-                <a16:creationId xmlns:a16="http://schemas.microsoft.com/office/drawing/2014/main" id="{E147A463-F319-4598-BBBD-1BD06C85A9A6}"/>
+                <a16:creationId xmlns:a16="http://schemas.microsoft.com/office/drawing/2014/main" id="{6A9A1868-664A-4562-AA69-EFD2B232E241}"/>
               </a:ext>
             </a:extLst>
           </p:cNvPr>
@@ -13689,7 +13697,7 @@
           <p:cNvPr id="14" name="">
             <a:extLst xmlns:a="http://schemas.openxmlformats.org/drawingml/2006/main">
               <a:ext uri="{FF2B5EF4-FFF2-40B4-BE49-F238E27FC236}">
-                <a16:creationId xmlns:a16="http://schemas.microsoft.com/office/drawing/2014/main" id="{6ECF440D-6D4D-41EE-9991-ED171516FAC0}"/>
+                <a16:creationId xmlns:a16="http://schemas.microsoft.com/office/drawing/2014/main" id="{9E1157AD-23BB-40FC-8EFD-7EFC360148A9}"/>
               </a:ext>
             </a:extLst>
           </p:cNvPr>
@@ -13723,7 +13731,7 @@
           <p:cNvPr id="15" name="">
             <a:extLst xmlns:a="http://schemas.openxmlformats.org/drawingml/2006/main">
               <a:ext uri="{FF2B5EF4-FFF2-40B4-BE49-F238E27FC236}">
-                <a16:creationId xmlns:a16="http://schemas.microsoft.com/office/drawing/2014/main" id="{D29919C7-DB29-4A31-887C-7C8F1074652C}"/>
+                <a16:creationId xmlns:a16="http://schemas.microsoft.com/office/drawing/2014/main" id="{A3D49526-ECEB-4765-AA12-949EF5745B31}"/>
               </a:ext>
             </a:extLst>
           </p:cNvPr>
@@ -13755,7 +13763,7 @@
           <p:cNvPr id="16" name="">
             <a:extLst xmlns:a="http://schemas.openxmlformats.org/drawingml/2006/main">
               <a:ext uri="{FF2B5EF4-FFF2-40B4-BE49-F238E27FC236}">
-                <a16:creationId xmlns:a16="http://schemas.microsoft.com/office/drawing/2014/main" id="{3DCB3B43-2373-4C60-83B8-A0F0C7CE5B8E}"/>
+                <a16:creationId xmlns:a16="http://schemas.microsoft.com/office/drawing/2014/main" id="{BE9E55AE-7072-4B7D-98AA-43B47C84E912}"/>
               </a:ext>
             </a:extLst>
           </p:cNvPr>
@@ -13812,7 +13820,7 @@
           <p:cNvPr id="17" name="">
             <a:extLst xmlns:a="http://schemas.openxmlformats.org/drawingml/2006/main">
               <a:ext uri="{FF2B5EF4-FFF2-40B4-BE49-F238E27FC236}">
-                <a16:creationId xmlns:a16="http://schemas.microsoft.com/office/drawing/2014/main" id="{732985AE-8004-40AB-A1E0-95CEC05CB078}"/>
+                <a16:creationId xmlns:a16="http://schemas.microsoft.com/office/drawing/2014/main" id="{7DF42F65-8154-4DE7-A702-B21EAEB37B9B}"/>
               </a:ext>
             </a:extLst>
           </p:cNvPr>
@@ -13869,7 +13877,7 @@
           <p:cNvPr id="18" name="">
             <a:extLst xmlns:a="http://schemas.openxmlformats.org/drawingml/2006/main">
               <a:ext uri="{FF2B5EF4-FFF2-40B4-BE49-F238E27FC236}">
-                <a16:creationId xmlns:a16="http://schemas.microsoft.com/office/drawing/2014/main" id="{5447432F-50C8-4803-85A4-4AF976656529}"/>
+                <a16:creationId xmlns:a16="http://schemas.microsoft.com/office/drawing/2014/main" id="{06B9997C-5EC0-4F1D-B45B-02C85775511D}"/>
               </a:ext>
             </a:extLst>
           </p:cNvPr>
@@ -13903,7 +13911,7 @@
           <p:cNvPr id="19" name="">
             <a:extLst xmlns:a="http://schemas.openxmlformats.org/drawingml/2006/main">
               <a:ext uri="{FF2B5EF4-FFF2-40B4-BE49-F238E27FC236}">
-                <a16:creationId xmlns:a16="http://schemas.microsoft.com/office/drawing/2014/main" id="{CF4A8ACE-9417-4971-A1B7-8C8B02BE2632}"/>
+                <a16:creationId xmlns:a16="http://schemas.microsoft.com/office/drawing/2014/main" id="{D7189F11-EC81-494C-9AA8-5C9150585E45}"/>
               </a:ext>
             </a:extLst>
           </p:cNvPr>
@@ -13935,7 +13943,7 @@
           <p:cNvPr id="20" name="">
             <a:extLst xmlns:a="http://schemas.openxmlformats.org/drawingml/2006/main">
               <a:ext uri="{FF2B5EF4-FFF2-40B4-BE49-F238E27FC236}">
-                <a16:creationId xmlns:a16="http://schemas.microsoft.com/office/drawing/2014/main" id="{058880A3-A2C8-44D0-AD31-B7B4F5E6ABCD}"/>
+                <a16:creationId xmlns:a16="http://schemas.microsoft.com/office/drawing/2014/main" id="{749A35C5-6417-4438-94B8-5754E8FC7895}"/>
               </a:ext>
             </a:extLst>
           </p:cNvPr>
@@ -13992,7 +14000,7 @@
           <p:cNvPr id="21" name="">
             <a:extLst xmlns:a="http://schemas.openxmlformats.org/drawingml/2006/main">
               <a:ext uri="{FF2B5EF4-FFF2-40B4-BE49-F238E27FC236}">
-                <a16:creationId xmlns:a16="http://schemas.microsoft.com/office/drawing/2014/main" id="{95D70DA7-FE14-4BB2-BA95-C827CA8BDEAC}"/>
+                <a16:creationId xmlns:a16="http://schemas.microsoft.com/office/drawing/2014/main" id="{A95AF2C1-D6A9-4466-AE19-414EED7C90A4}"/>
               </a:ext>
             </a:extLst>
           </p:cNvPr>
@@ -14047,7 +14055,7 @@
     </p:spTree>
     <p:extLst>
       <p:ext uri="{BB962C8B-B14F-4D97-AF65-F5344CB8AC3E}">
-        <p14:creationId xmlns:p14="http://schemas.microsoft.com/office/powerpoint/2010/main" val="1015766407"/>
+        <p14:creationId xmlns:p14="http://schemas.microsoft.com/office/powerpoint/2010/main" val="1915165733"/>
       </p:ext>
     </p:extLst>
   </p:cSld>
